--- a/Inglês/Março 26/Aula 16/System ADMIN - Lucas.pptx
+++ b/Inglês/Março 26/Aula 16/System ADMIN - Lucas.pptx
@@ -1,27 +1,34 @@
 
 <file path=ppt/presentation.xml><?xml version="1.0" encoding="utf-8"?>
-<p:presentation xmlns:a="http://schemas.openxmlformats.org/drawingml/2006/main" xmlns:r="http://schemas.openxmlformats.org/officeDocument/2006/relationships" xmlns:p="http://schemas.openxmlformats.org/presentationml/2006/main" saveSubsetFonts="1" embedTrueTypeFonts="true">
+<p:presentation xmlns:a="http://schemas.openxmlformats.org/drawingml/2006/main" xmlns:r="http://schemas.openxmlformats.org/officeDocument/2006/relationships" xmlns:p="http://schemas.openxmlformats.org/presentationml/2006/main" embedTrueTypeFonts="1" saveSubsetFonts="1">
   <p:sldMasterIdLst>
     <p:sldMasterId id="2147483648" r:id="rId1"/>
   </p:sldMasterIdLst>
   <p:sldIdLst>
-    <p:sldId id="256" r:id="rId6"/>
-    <p:sldId id="257" r:id="rId7"/>
-    <p:sldId id="258" r:id="rId8"/>
-    <p:sldId id="259" r:id="rId9"/>
-    <p:sldId id="260" r:id="rId10"/>
-    <p:sldId id="261" r:id="rId11"/>
-    <p:sldId id="262" r:id="rId12"/>
+    <p:sldId id="256" r:id="rId2"/>
+    <p:sldId id="257" r:id="rId3"/>
+    <p:sldId id="258" r:id="rId4"/>
+    <p:sldId id="259" r:id="rId5"/>
+    <p:sldId id="260" r:id="rId6"/>
+    <p:sldId id="261" r:id="rId7"/>
+    <p:sldId id="262" r:id="rId8"/>
   </p:sldIdLst>
   <p:sldSz cx="18288000" cy="10287000"/>
   <p:notesSz cx="6858000" cy="9144000"/>
   <p:embeddedFontLst>
     <p:embeddedFont>
-      <p:font typeface="TT Hoves" charset="1" panose="02000003020000060003"/>
+      <p:font typeface="Calibri" panose="020F0502020204030204" pitchFamily="34" charset="0"/>
+      <p:regular r:id="rId9"/>
+      <p:bold r:id="rId10"/>
+      <p:italic r:id="rId11"/>
+      <p:boldItalic r:id="rId12"/>
+    </p:embeddedFont>
+    <p:embeddedFont>
+      <p:font typeface="TT Hoves" panose="020B0604020202020204" charset="0"/>
       <p:regular r:id="rId13"/>
     </p:embeddedFont>
     <p:embeddedFont>
-      <p:font typeface="TT Hoves Bold" charset="1" panose="02000003020000060003"/>
+      <p:font typeface="TT Hoves Bold" panose="020B0604020202020204" charset="0"/>
       <p:regular r:id="rId14"/>
     </p:embeddedFont>
   </p:embeddedFontLst>
@@ -120,6 +127,22 @@
       </a:defRPr>
     </a:lvl9pPr>
   </p:defaultTextStyle>
+  <p:extLst>
+    <p:ext uri="{EFAFB233-063F-42B5-8137-9DF3F51BA10A}">
+      <p15:sldGuideLst xmlns:p15="http://schemas.microsoft.com/office/powerpoint/2012/main">
+        <p15:guide id="1" orient="horz" pos="2160">
+          <p15:clr>
+            <a:srgbClr val="A4A3A4"/>
+          </p15:clr>
+        </p15:guide>
+        <p15:guide id="2" pos="2880">
+          <p15:clr>
+            <a:srgbClr val="A4A3A4"/>
+          </p15:clr>
+        </p15:guide>
+      </p15:sldGuideLst>
+    </p:ext>
+  </p:extLst>
 </p:presentation>
 </file>
 
@@ -161,10 +184,9 @@
           <a:lstStyle/>
           <a:p>
             <a:r>
-              <a:rPr lang="en-US" smtClean="0"/>
+              <a:rPr lang="en-US"/>
               <a:t>Click to edit Master title style</a:t>
             </a:r>
-            <a:endParaRPr lang="en-US"/>
           </a:p>
         </p:txBody>
       </p:sp>
@@ -280,10 +302,9 @@
           </a:lstStyle>
           <a:p>
             <a:r>
-              <a:rPr lang="en-US" smtClean="0"/>
+              <a:rPr lang="en-US"/>
               <a:t>Click to edit Master subtitle style</a:t>
             </a:r>
-            <a:endParaRPr lang="en-US"/>
           </a:p>
         </p:txBody>
       </p:sp>
@@ -305,7 +326,7 @@
             <a:fld id="{1D8BD707-D9CF-40AE-B4C6-C98DA3205C09}" type="datetimeFigureOut">
               <a:rPr lang="en-US" smtClean="0"/>
               <a:pPr/>
-              <a:t>8/1/2011</a:t>
+              <a:t>3/18/2026</a:t>
             </a:fld>
             <a:endParaRPr lang="en-US"/>
           </a:p>
@@ -348,7 +369,7 @@
             <a:fld id="{B6F15528-21DE-4FAA-801E-634DDDAF4B2B}" type="slidenum">
               <a:rPr lang="en-US" smtClean="0"/>
               <a:pPr/>
-              <a:t>‹#›</a:t>
+              <a:t>‹nº›</a:t>
             </a:fld>
             <a:endParaRPr lang="en-US"/>
           </a:p>
@@ -395,10 +416,9 @@
           <a:lstStyle/>
           <a:p>
             <a:r>
-              <a:rPr lang="en-US" smtClean="0"/>
+              <a:rPr lang="en-US"/>
               <a:t>Click to edit Master title style</a:t>
             </a:r>
-            <a:endParaRPr lang="en-US"/>
           </a:p>
         </p:txBody>
       </p:sp>
@@ -419,38 +439,37 @@
           <a:p>
             <a:pPr lvl="0"/>
             <a:r>
-              <a:rPr lang="en-US" smtClean="0"/>
+              <a:rPr lang="en-US"/>
               <a:t>Click to edit Master text styles</a:t>
             </a:r>
           </a:p>
           <a:p>
             <a:pPr lvl="1"/>
             <a:r>
-              <a:rPr lang="en-US" smtClean="0"/>
+              <a:rPr lang="en-US"/>
               <a:t>Second level</a:t>
             </a:r>
           </a:p>
           <a:p>
             <a:pPr lvl="2"/>
             <a:r>
-              <a:rPr lang="en-US" smtClean="0"/>
+              <a:rPr lang="en-US"/>
               <a:t>Third level</a:t>
             </a:r>
           </a:p>
           <a:p>
             <a:pPr lvl="3"/>
             <a:r>
-              <a:rPr lang="en-US" smtClean="0"/>
+              <a:rPr lang="en-US"/>
               <a:t>Fourth level</a:t>
             </a:r>
           </a:p>
           <a:p>
             <a:pPr lvl="4"/>
             <a:r>
-              <a:rPr lang="en-US" smtClean="0"/>
+              <a:rPr lang="en-US"/>
               <a:t>Fifth level</a:t>
             </a:r>
-            <a:endParaRPr lang="en-US"/>
           </a:p>
         </p:txBody>
       </p:sp>
@@ -472,7 +491,7 @@
             <a:fld id="{1D8BD707-D9CF-40AE-B4C6-C98DA3205C09}" type="datetimeFigureOut">
               <a:rPr lang="en-US" smtClean="0"/>
               <a:pPr/>
-              <a:t>8/1/2011</a:t>
+              <a:t>3/18/2026</a:t>
             </a:fld>
             <a:endParaRPr lang="en-US"/>
           </a:p>
@@ -515,7 +534,7 @@
             <a:fld id="{B6F15528-21DE-4FAA-801E-634DDDAF4B2B}" type="slidenum">
               <a:rPr lang="en-US" smtClean="0"/>
               <a:pPr/>
-              <a:t>‹#›</a:t>
+              <a:t>‹nº›</a:t>
             </a:fld>
             <a:endParaRPr lang="en-US"/>
           </a:p>
@@ -567,10 +586,9 @@
           <a:lstStyle/>
           <a:p>
             <a:r>
-              <a:rPr lang="en-US" smtClean="0"/>
+              <a:rPr lang="en-US"/>
               <a:t>Click to edit Master title style</a:t>
             </a:r>
-            <a:endParaRPr lang="en-US"/>
           </a:p>
         </p:txBody>
       </p:sp>
@@ -596,38 +614,37 @@
           <a:p>
             <a:pPr lvl="0"/>
             <a:r>
-              <a:rPr lang="en-US" smtClean="0"/>
+              <a:rPr lang="en-US"/>
               <a:t>Click to edit Master text styles</a:t>
             </a:r>
           </a:p>
           <a:p>
             <a:pPr lvl="1"/>
             <a:r>
-              <a:rPr lang="en-US" smtClean="0"/>
+              <a:rPr lang="en-US"/>
               <a:t>Second level</a:t>
             </a:r>
           </a:p>
           <a:p>
             <a:pPr lvl="2"/>
             <a:r>
-              <a:rPr lang="en-US" smtClean="0"/>
+              <a:rPr lang="en-US"/>
               <a:t>Third level</a:t>
             </a:r>
           </a:p>
           <a:p>
             <a:pPr lvl="3"/>
             <a:r>
-              <a:rPr lang="en-US" smtClean="0"/>
+              <a:rPr lang="en-US"/>
               <a:t>Fourth level</a:t>
             </a:r>
           </a:p>
           <a:p>
             <a:pPr lvl="4"/>
             <a:r>
-              <a:rPr lang="en-US" smtClean="0"/>
+              <a:rPr lang="en-US"/>
               <a:t>Fifth level</a:t>
             </a:r>
-            <a:endParaRPr lang="en-US"/>
           </a:p>
         </p:txBody>
       </p:sp>
@@ -649,7 +666,7 @@
             <a:fld id="{1D8BD707-D9CF-40AE-B4C6-C98DA3205C09}" type="datetimeFigureOut">
               <a:rPr lang="en-US" smtClean="0"/>
               <a:pPr/>
-              <a:t>8/1/2011</a:t>
+              <a:t>3/18/2026</a:t>
             </a:fld>
             <a:endParaRPr lang="en-US"/>
           </a:p>
@@ -692,7 +709,7 @@
             <a:fld id="{B6F15528-21DE-4FAA-801E-634DDDAF4B2B}" type="slidenum">
               <a:rPr lang="en-US" smtClean="0"/>
               <a:pPr/>
-              <a:t>‹#›</a:t>
+              <a:t>‹nº›</a:t>
             </a:fld>
             <a:endParaRPr lang="en-US"/>
           </a:p>
@@ -739,10 +756,9 @@
           <a:lstStyle/>
           <a:p>
             <a:r>
-              <a:rPr lang="en-US" smtClean="0"/>
+              <a:rPr lang="en-US"/>
               <a:t>Click to edit Master title style</a:t>
             </a:r>
-            <a:endParaRPr lang="en-US"/>
           </a:p>
         </p:txBody>
       </p:sp>
@@ -763,38 +779,37 @@
           <a:p>
             <a:pPr lvl="0"/>
             <a:r>
-              <a:rPr lang="en-US" smtClean="0"/>
+              <a:rPr lang="en-US"/>
               <a:t>Click to edit Master text styles</a:t>
             </a:r>
           </a:p>
           <a:p>
             <a:pPr lvl="1"/>
             <a:r>
-              <a:rPr lang="en-US" smtClean="0"/>
+              <a:rPr lang="en-US"/>
               <a:t>Second level</a:t>
             </a:r>
           </a:p>
           <a:p>
             <a:pPr lvl="2"/>
             <a:r>
-              <a:rPr lang="en-US" smtClean="0"/>
+              <a:rPr lang="en-US"/>
               <a:t>Third level</a:t>
             </a:r>
           </a:p>
           <a:p>
             <a:pPr lvl="3"/>
             <a:r>
-              <a:rPr lang="en-US" smtClean="0"/>
+              <a:rPr lang="en-US"/>
               <a:t>Fourth level</a:t>
             </a:r>
           </a:p>
           <a:p>
             <a:pPr lvl="4"/>
             <a:r>
-              <a:rPr lang="en-US" smtClean="0"/>
+              <a:rPr lang="en-US"/>
               <a:t>Fifth level</a:t>
             </a:r>
-            <a:endParaRPr lang="en-US"/>
           </a:p>
         </p:txBody>
       </p:sp>
@@ -816,7 +831,7 @@
             <a:fld id="{1D8BD707-D9CF-40AE-B4C6-C98DA3205C09}" type="datetimeFigureOut">
               <a:rPr lang="en-US" smtClean="0"/>
               <a:pPr/>
-              <a:t>8/1/2011</a:t>
+              <a:t>3/18/2026</a:t>
             </a:fld>
             <a:endParaRPr lang="en-US"/>
           </a:p>
@@ -859,7 +874,7 @@
             <a:fld id="{B6F15528-21DE-4FAA-801E-634DDDAF4B2B}" type="slidenum">
               <a:rPr lang="en-US" smtClean="0"/>
               <a:pPr/>
-              <a:t>‹#›</a:t>
+              <a:t>‹nº›</a:t>
             </a:fld>
             <a:endParaRPr lang="en-US"/>
           </a:p>
@@ -915,10 +930,9 @@
           </a:lstStyle>
           <a:p>
             <a:r>
-              <a:rPr lang="en-US" smtClean="0"/>
+              <a:rPr lang="en-US"/>
               <a:t>Click to edit Master title style</a:t>
             </a:r>
-            <a:endParaRPr lang="en-US"/>
           </a:p>
         </p:txBody>
       </p:sp>
@@ -1035,7 +1049,7 @@
           <a:p>
             <a:pPr lvl="0"/>
             <a:r>
-              <a:rPr lang="en-US" smtClean="0"/>
+              <a:rPr lang="en-US"/>
               <a:t>Click to edit Master text styles</a:t>
             </a:r>
           </a:p>
@@ -1059,7 +1073,7 @@
             <a:fld id="{1D8BD707-D9CF-40AE-B4C6-C98DA3205C09}" type="datetimeFigureOut">
               <a:rPr lang="en-US" smtClean="0"/>
               <a:pPr/>
-              <a:t>8/1/2011</a:t>
+              <a:t>3/18/2026</a:t>
             </a:fld>
             <a:endParaRPr lang="en-US"/>
           </a:p>
@@ -1102,7 +1116,7 @@
             <a:fld id="{B6F15528-21DE-4FAA-801E-634DDDAF4B2B}" type="slidenum">
               <a:rPr lang="en-US" smtClean="0"/>
               <a:pPr/>
-              <a:t>‹#›</a:t>
+              <a:t>‹nº›</a:t>
             </a:fld>
             <a:endParaRPr lang="en-US"/>
           </a:p>
@@ -1149,10 +1163,9 @@
           <a:lstStyle/>
           <a:p>
             <a:r>
-              <a:rPr lang="en-US" smtClean="0"/>
+              <a:rPr lang="en-US"/>
               <a:t>Click to edit Master title style</a:t>
             </a:r>
-            <a:endParaRPr lang="en-US"/>
           </a:p>
         </p:txBody>
       </p:sp>
@@ -1206,38 +1219,37 @@
           <a:p>
             <a:pPr lvl="0"/>
             <a:r>
-              <a:rPr lang="en-US" smtClean="0"/>
+              <a:rPr lang="en-US"/>
               <a:t>Click to edit Master text styles</a:t>
             </a:r>
           </a:p>
           <a:p>
             <a:pPr lvl="1"/>
             <a:r>
-              <a:rPr lang="en-US" smtClean="0"/>
+              <a:rPr lang="en-US"/>
               <a:t>Second level</a:t>
             </a:r>
           </a:p>
           <a:p>
             <a:pPr lvl="2"/>
             <a:r>
-              <a:rPr lang="en-US" smtClean="0"/>
+              <a:rPr lang="en-US"/>
               <a:t>Third level</a:t>
             </a:r>
           </a:p>
           <a:p>
             <a:pPr lvl="3"/>
             <a:r>
-              <a:rPr lang="en-US" smtClean="0"/>
+              <a:rPr lang="en-US"/>
               <a:t>Fourth level</a:t>
             </a:r>
           </a:p>
           <a:p>
             <a:pPr lvl="4"/>
             <a:r>
-              <a:rPr lang="en-US" smtClean="0"/>
+              <a:rPr lang="en-US"/>
               <a:t>Fifth level</a:t>
             </a:r>
-            <a:endParaRPr lang="en-US"/>
           </a:p>
         </p:txBody>
       </p:sp>
@@ -1291,38 +1303,37 @@
           <a:p>
             <a:pPr lvl="0"/>
             <a:r>
-              <a:rPr lang="en-US" smtClean="0"/>
+              <a:rPr lang="en-US"/>
               <a:t>Click to edit Master text styles</a:t>
             </a:r>
           </a:p>
           <a:p>
             <a:pPr lvl="1"/>
             <a:r>
-              <a:rPr lang="en-US" smtClean="0"/>
+              <a:rPr lang="en-US"/>
               <a:t>Second level</a:t>
             </a:r>
           </a:p>
           <a:p>
             <a:pPr lvl="2"/>
             <a:r>
-              <a:rPr lang="en-US" smtClean="0"/>
+              <a:rPr lang="en-US"/>
               <a:t>Third level</a:t>
             </a:r>
           </a:p>
           <a:p>
             <a:pPr lvl="3"/>
             <a:r>
-              <a:rPr lang="en-US" smtClean="0"/>
+              <a:rPr lang="en-US"/>
               <a:t>Fourth level</a:t>
             </a:r>
           </a:p>
           <a:p>
             <a:pPr lvl="4"/>
             <a:r>
-              <a:rPr lang="en-US" smtClean="0"/>
+              <a:rPr lang="en-US"/>
               <a:t>Fifth level</a:t>
             </a:r>
-            <a:endParaRPr lang="en-US"/>
           </a:p>
         </p:txBody>
       </p:sp>
@@ -1344,7 +1355,7 @@
             <a:fld id="{1D8BD707-D9CF-40AE-B4C6-C98DA3205C09}" type="datetimeFigureOut">
               <a:rPr lang="en-US" smtClean="0"/>
               <a:pPr/>
-              <a:t>8/1/2011</a:t>
+              <a:t>3/18/2026</a:t>
             </a:fld>
             <a:endParaRPr lang="en-US"/>
           </a:p>
@@ -1387,7 +1398,7 @@
             <a:fld id="{B6F15528-21DE-4FAA-801E-634DDDAF4B2B}" type="slidenum">
               <a:rPr lang="en-US" smtClean="0"/>
               <a:pPr/>
-              <a:t>‹#›</a:t>
+              <a:t>‹nº›</a:t>
             </a:fld>
             <a:endParaRPr lang="en-US"/>
           </a:p>
@@ -1438,10 +1449,9 @@
           </a:lstStyle>
           <a:p>
             <a:r>
-              <a:rPr lang="en-US" smtClean="0"/>
+              <a:rPr lang="en-US"/>
               <a:t>Click to edit Master title style</a:t>
             </a:r>
-            <a:endParaRPr lang="en-US"/>
           </a:p>
         </p:txBody>
       </p:sp>
@@ -1504,7 +1514,7 @@
           <a:p>
             <a:pPr lvl="0"/>
             <a:r>
-              <a:rPr lang="en-US" smtClean="0"/>
+              <a:rPr lang="en-US"/>
               <a:t>Click to edit Master text styles</a:t>
             </a:r>
           </a:p>
@@ -1560,38 +1570,37 @@
           <a:p>
             <a:pPr lvl="0"/>
             <a:r>
-              <a:rPr lang="en-US" smtClean="0"/>
+              <a:rPr lang="en-US"/>
               <a:t>Click to edit Master text styles</a:t>
             </a:r>
           </a:p>
           <a:p>
             <a:pPr lvl="1"/>
             <a:r>
-              <a:rPr lang="en-US" smtClean="0"/>
+              <a:rPr lang="en-US"/>
               <a:t>Second level</a:t>
             </a:r>
           </a:p>
           <a:p>
             <a:pPr lvl="2"/>
             <a:r>
-              <a:rPr lang="en-US" smtClean="0"/>
+              <a:rPr lang="en-US"/>
               <a:t>Third level</a:t>
             </a:r>
           </a:p>
           <a:p>
             <a:pPr lvl="3"/>
             <a:r>
-              <a:rPr lang="en-US" smtClean="0"/>
+              <a:rPr lang="en-US"/>
               <a:t>Fourth level</a:t>
             </a:r>
           </a:p>
           <a:p>
             <a:pPr lvl="4"/>
             <a:r>
-              <a:rPr lang="en-US" smtClean="0"/>
+              <a:rPr lang="en-US"/>
               <a:t>Fifth level</a:t>
             </a:r>
-            <a:endParaRPr lang="en-US"/>
           </a:p>
         </p:txBody>
       </p:sp>
@@ -1654,7 +1663,7 @@
           <a:p>
             <a:pPr lvl="0"/>
             <a:r>
-              <a:rPr lang="en-US" smtClean="0"/>
+              <a:rPr lang="en-US"/>
               <a:t>Click to edit Master text styles</a:t>
             </a:r>
           </a:p>
@@ -1710,38 +1719,37 @@
           <a:p>
             <a:pPr lvl="0"/>
             <a:r>
-              <a:rPr lang="en-US" smtClean="0"/>
+              <a:rPr lang="en-US"/>
               <a:t>Click to edit Master text styles</a:t>
             </a:r>
           </a:p>
           <a:p>
             <a:pPr lvl="1"/>
             <a:r>
-              <a:rPr lang="en-US" smtClean="0"/>
+              <a:rPr lang="en-US"/>
               <a:t>Second level</a:t>
             </a:r>
           </a:p>
           <a:p>
             <a:pPr lvl="2"/>
             <a:r>
-              <a:rPr lang="en-US" smtClean="0"/>
+              <a:rPr lang="en-US"/>
               <a:t>Third level</a:t>
             </a:r>
           </a:p>
           <a:p>
             <a:pPr lvl="3"/>
             <a:r>
-              <a:rPr lang="en-US" smtClean="0"/>
+              <a:rPr lang="en-US"/>
               <a:t>Fourth level</a:t>
             </a:r>
           </a:p>
           <a:p>
             <a:pPr lvl="4"/>
             <a:r>
-              <a:rPr lang="en-US" smtClean="0"/>
+              <a:rPr lang="en-US"/>
               <a:t>Fifth level</a:t>
             </a:r>
-            <a:endParaRPr lang="en-US"/>
           </a:p>
         </p:txBody>
       </p:sp>
@@ -1763,7 +1771,7 @@
             <a:fld id="{1D8BD707-D9CF-40AE-B4C6-C98DA3205C09}" type="datetimeFigureOut">
               <a:rPr lang="en-US" smtClean="0"/>
               <a:pPr/>
-              <a:t>8/1/2011</a:t>
+              <a:t>3/18/2026</a:t>
             </a:fld>
             <a:endParaRPr lang="en-US"/>
           </a:p>
@@ -1806,7 +1814,7 @@
             <a:fld id="{B6F15528-21DE-4FAA-801E-634DDDAF4B2B}" type="slidenum">
               <a:rPr lang="en-US" smtClean="0"/>
               <a:pPr/>
-              <a:t>‹#›</a:t>
+              <a:t>‹nº›</a:t>
             </a:fld>
             <a:endParaRPr lang="en-US"/>
           </a:p>
@@ -1853,10 +1861,9 @@
           <a:lstStyle/>
           <a:p>
             <a:r>
-              <a:rPr lang="en-US" smtClean="0"/>
+              <a:rPr lang="en-US"/>
               <a:t>Click to edit Master title style</a:t>
             </a:r>
-            <a:endParaRPr lang="en-US"/>
           </a:p>
         </p:txBody>
       </p:sp>
@@ -1878,7 +1885,7 @@
             <a:fld id="{1D8BD707-D9CF-40AE-B4C6-C98DA3205C09}" type="datetimeFigureOut">
               <a:rPr lang="en-US" smtClean="0"/>
               <a:pPr/>
-              <a:t>8/1/2011</a:t>
+              <a:t>3/18/2026</a:t>
             </a:fld>
             <a:endParaRPr lang="en-US"/>
           </a:p>
@@ -1921,7 +1928,7 @@
             <a:fld id="{B6F15528-21DE-4FAA-801E-634DDDAF4B2B}" type="slidenum">
               <a:rPr lang="en-US" smtClean="0"/>
               <a:pPr/>
-              <a:t>‹#›</a:t>
+              <a:t>‹nº›</a:t>
             </a:fld>
             <a:endParaRPr lang="en-US"/>
           </a:p>
@@ -1970,7 +1977,7 @@
             <a:fld id="{1D8BD707-D9CF-40AE-B4C6-C98DA3205C09}" type="datetimeFigureOut">
               <a:rPr lang="en-US" smtClean="0"/>
               <a:pPr/>
-              <a:t>8/1/2011</a:t>
+              <a:t>3/18/2026</a:t>
             </a:fld>
             <a:endParaRPr lang="en-US"/>
           </a:p>
@@ -2013,7 +2020,7 @@
             <a:fld id="{B6F15528-21DE-4FAA-801E-634DDDAF4B2B}" type="slidenum">
               <a:rPr lang="en-US" smtClean="0"/>
               <a:pPr/>
-              <a:t>‹#›</a:t>
+              <a:t>‹nº›</a:t>
             </a:fld>
             <a:endParaRPr lang="en-US"/>
           </a:p>
@@ -2069,10 +2076,9 @@
           </a:lstStyle>
           <a:p>
             <a:r>
-              <a:rPr lang="en-US" smtClean="0"/>
+              <a:rPr lang="en-US"/>
               <a:t>Click to edit Master title style</a:t>
             </a:r>
-            <a:endParaRPr lang="en-US"/>
           </a:p>
         </p:txBody>
       </p:sp>
@@ -2126,38 +2132,37 @@
           <a:p>
             <a:pPr lvl="0"/>
             <a:r>
-              <a:rPr lang="en-US" smtClean="0"/>
+              <a:rPr lang="en-US"/>
               <a:t>Click to edit Master text styles</a:t>
             </a:r>
           </a:p>
           <a:p>
             <a:pPr lvl="1"/>
             <a:r>
-              <a:rPr lang="en-US" smtClean="0"/>
+              <a:rPr lang="en-US"/>
               <a:t>Second level</a:t>
             </a:r>
           </a:p>
           <a:p>
             <a:pPr lvl="2"/>
             <a:r>
-              <a:rPr lang="en-US" smtClean="0"/>
+              <a:rPr lang="en-US"/>
               <a:t>Third level</a:t>
             </a:r>
           </a:p>
           <a:p>
             <a:pPr lvl="3"/>
             <a:r>
-              <a:rPr lang="en-US" smtClean="0"/>
+              <a:rPr lang="en-US"/>
               <a:t>Fourth level</a:t>
             </a:r>
           </a:p>
           <a:p>
             <a:pPr lvl="4"/>
             <a:r>
-              <a:rPr lang="en-US" smtClean="0"/>
+              <a:rPr lang="en-US"/>
               <a:t>Fifth level</a:t>
             </a:r>
-            <a:endParaRPr lang="en-US"/>
           </a:p>
         </p:txBody>
       </p:sp>
@@ -2220,7 +2225,7 @@
           <a:p>
             <a:pPr lvl="0"/>
             <a:r>
-              <a:rPr lang="en-US" smtClean="0"/>
+              <a:rPr lang="en-US"/>
               <a:t>Click to edit Master text styles</a:t>
             </a:r>
           </a:p>
@@ -2244,7 +2249,7 @@
             <a:fld id="{1D8BD707-D9CF-40AE-B4C6-C98DA3205C09}" type="datetimeFigureOut">
               <a:rPr lang="en-US" smtClean="0"/>
               <a:pPr/>
-              <a:t>8/1/2011</a:t>
+              <a:t>3/18/2026</a:t>
             </a:fld>
             <a:endParaRPr lang="en-US"/>
           </a:p>
@@ -2287,7 +2292,7 @@
             <a:fld id="{B6F15528-21DE-4FAA-801E-634DDDAF4B2B}" type="slidenum">
               <a:rPr lang="en-US" smtClean="0"/>
               <a:pPr/>
-              <a:t>‹#›</a:t>
+              <a:t>‹nº›</a:t>
             </a:fld>
             <a:endParaRPr lang="en-US"/>
           </a:p>
@@ -2343,10 +2348,9 @@
           </a:lstStyle>
           <a:p>
             <a:r>
-              <a:rPr lang="en-US" smtClean="0"/>
+              <a:rPr lang="en-US"/>
               <a:t>Click to edit Master title style</a:t>
             </a:r>
-            <a:endParaRPr lang="en-US"/>
           </a:p>
         </p:txBody>
       </p:sp>
@@ -2470,7 +2474,7 @@
           <a:p>
             <a:pPr lvl="0"/>
             <a:r>
-              <a:rPr lang="en-US" smtClean="0"/>
+              <a:rPr lang="en-US"/>
               <a:t>Click to edit Master text styles</a:t>
             </a:r>
           </a:p>
@@ -2494,7 +2498,7 @@
             <a:fld id="{1D8BD707-D9CF-40AE-B4C6-C98DA3205C09}" type="datetimeFigureOut">
               <a:rPr lang="en-US" smtClean="0"/>
               <a:pPr/>
-              <a:t>8/1/2011</a:t>
+              <a:t>3/18/2026</a:t>
             </a:fld>
             <a:endParaRPr lang="en-US"/>
           </a:p>
@@ -2537,7 +2541,7 @@
             <a:fld id="{B6F15528-21DE-4FAA-801E-634DDDAF4B2B}" type="slidenum">
               <a:rPr lang="en-US" smtClean="0"/>
               <a:pPr/>
-              <a:t>‹#›</a:t>
+              <a:t>‹nº›</a:t>
             </a:fld>
             <a:endParaRPr lang="en-US"/>
           </a:p>
@@ -2599,10 +2603,9 @@
           <a:lstStyle/>
           <a:p>
             <a:r>
-              <a:rPr lang="en-US" smtClean="0"/>
+              <a:rPr lang="en-US"/>
               <a:t>Click to edit Master title style</a:t>
             </a:r>
-            <a:endParaRPr lang="en-US"/>
           </a:p>
         </p:txBody>
       </p:sp>
@@ -2633,38 +2636,37 @@
           <a:p>
             <a:pPr lvl="0"/>
             <a:r>
-              <a:rPr lang="en-US" smtClean="0"/>
+              <a:rPr lang="en-US"/>
               <a:t>Click to edit Master text styles</a:t>
             </a:r>
           </a:p>
           <a:p>
             <a:pPr lvl="1"/>
             <a:r>
-              <a:rPr lang="en-US" smtClean="0"/>
+              <a:rPr lang="en-US"/>
               <a:t>Second level</a:t>
             </a:r>
           </a:p>
           <a:p>
             <a:pPr lvl="2"/>
             <a:r>
-              <a:rPr lang="en-US" smtClean="0"/>
+              <a:rPr lang="en-US"/>
               <a:t>Third level</a:t>
             </a:r>
           </a:p>
           <a:p>
             <a:pPr lvl="3"/>
             <a:r>
-              <a:rPr lang="en-US" smtClean="0"/>
+              <a:rPr lang="en-US"/>
               <a:t>Fourth level</a:t>
             </a:r>
           </a:p>
           <a:p>
             <a:pPr lvl="4"/>
             <a:r>
-              <a:rPr lang="en-US" smtClean="0"/>
+              <a:rPr lang="en-US"/>
               <a:t>Fifth level</a:t>
             </a:r>
-            <a:endParaRPr lang="en-US"/>
           </a:p>
         </p:txBody>
       </p:sp>
@@ -2704,7 +2706,7 @@
             <a:fld id="{1D8BD707-D9CF-40AE-B4C6-C98DA3205C09}" type="datetimeFigureOut">
               <a:rPr lang="en-US" smtClean="0"/>
               <a:pPr/>
-              <a:t>8/1/2011</a:t>
+              <a:t>3/18/2026</a:t>
             </a:fld>
             <a:endParaRPr lang="en-US"/>
           </a:p>
@@ -2783,7 +2785,7 @@
             <a:fld id="{B6F15528-21DE-4FAA-801E-634DDDAF4B2B}" type="slidenum">
               <a:rPr lang="en-US" smtClean="0"/>
               <a:pPr/>
-              <a:t>‹#›</a:t>
+              <a:t>‹nº›</a:t>
             </a:fld>
             <a:endParaRPr lang="en-US"/>
           </a:p>
@@ -3059,13 +3061,14 @@
 </file>
 
 <file path=ppt/slides/slide1.xml><?xml version="1.0" encoding="utf-8"?>
-<p:sld xmlns:p="http://schemas.openxmlformats.org/presentationml/2006/main" xmlns:a="http://schemas.openxmlformats.org/drawingml/2006/main" xmlns:r="http://schemas.openxmlformats.org/officeDocument/2006/relationships">
+<p:sld xmlns:a="http://schemas.openxmlformats.org/drawingml/2006/main" xmlns:r="http://schemas.openxmlformats.org/officeDocument/2006/relationships" xmlns:p="http://schemas.openxmlformats.org/presentationml/2006/main">
   <p:cSld>
     <p:bg>
       <p:bgPr>
         <a:solidFill>
           <a:srgbClr val="92B8DD"/>
         </a:solidFill>
+        <a:effectLst/>
       </p:bgPr>
     </p:bg>
     <p:spTree>
@@ -3084,12 +3087,12 @@
       </p:grpSpPr>
       <p:grpSp>
         <p:nvGrpSpPr>
-          <p:cNvPr name="Group 2" id="2"/>
+          <p:cNvPr id="2" name="Group 2"/>
           <p:cNvGrpSpPr/>
           <p:nvPr/>
         </p:nvGrpSpPr>
         <p:grpSpPr>
-          <a:xfrm rot="0">
+          <a:xfrm>
             <a:off x="2111600" y="-153702"/>
             <a:ext cx="16363038" cy="8520557"/>
             <a:chOff x="0" y="0"/>
@@ -3098,12 +3101,12 @@
         </p:grpSpPr>
         <p:sp>
           <p:nvSpPr>
-            <p:cNvPr name="Freeform 3" id="3"/>
+            <p:cNvPr id="3" name="Freeform 3"/>
             <p:cNvSpPr/>
             <p:nvPr/>
           </p:nvSpPr>
           <p:spPr>
-            <a:xfrm flipH="false" flipV="false" rot="0">
+            <a:xfrm>
               <a:off x="0" y="0"/>
               <a:ext cx="4309607" cy="2244097"/>
             </a:xfrm>
@@ -3112,9 +3115,9 @@
               <a:gdLst/>
               <a:ahLst/>
               <a:cxnLst/>
-              <a:rect r="r" b="b" t="t" l="l"/>
+              <a:rect l="l" t="t" r="r" b="b"/>
               <a:pathLst>
-                <a:path h="2244097" w="4309607">
+                <a:path w="4309607" h="2244097">
                   <a:moveTo>
                     <a:pt x="0" y="0"/>
                   </a:moveTo>
@@ -3138,8 +3141,8 @@
         </p:sp>
         <p:sp>
           <p:nvSpPr>
-            <p:cNvPr name="TextBox 4" id="4"/>
-            <p:cNvSpPr txBox="true"/>
+            <p:cNvPr id="4" name="TextBox 4"/>
+            <p:cNvSpPr txBox="1"/>
             <p:nvPr/>
           </p:nvSpPr>
           <p:spPr>
@@ -3152,10 +3155,10 @@
             </a:prstGeom>
           </p:spPr>
           <p:txBody>
-            <a:bodyPr anchor="ctr" rtlCol="false" tIns="50800" lIns="50800" bIns="50800" rIns="50800"/>
+            <a:bodyPr lIns="50800" tIns="50800" rIns="50800" bIns="50800" rtlCol="0" anchor="ctr"/>
             <a:lstStyle/>
             <a:p>
-              <a:pPr algn="ctr" marL="0" indent="0" lvl="0">
+              <a:pPr marL="0" lvl="0" indent="0" algn="ctr">
                 <a:lnSpc>
                   <a:spcPts val="2659"/>
                 </a:lnSpc>
@@ -3163,18 +3166,19 @@
                   <a:spcPct val="0"/>
                 </a:spcBef>
               </a:pPr>
+              <a:endParaRPr/>
             </a:p>
           </p:txBody>
         </p:sp>
       </p:grpSp>
       <p:sp>
         <p:nvSpPr>
-          <p:cNvPr name="Freeform 5" id="5"/>
+          <p:cNvPr id="5" name="Freeform 5"/>
           <p:cNvSpPr/>
           <p:nvPr/>
         </p:nvSpPr>
         <p:spPr>
-          <a:xfrm flipH="false" flipV="false" rot="0">
+          <a:xfrm>
             <a:off x="16653114" y="640862"/>
             <a:ext cx="852752" cy="806917"/>
           </a:xfrm>
@@ -3183,9 +3187,9 @@
             <a:gdLst/>
             <a:ahLst/>
             <a:cxnLst/>
-            <a:rect r="r" b="b" t="t" l="l"/>
+            <a:rect l="l" t="t" r="r" b="b"/>
             <a:pathLst>
-              <a:path h="806917" w="852752">
+              <a:path w="852752" h="806917">
                 <a:moveTo>
                   <a:pt x="0" y="0"/>
                 </a:moveTo>
@@ -3214,14 +3218,14 @@
               </a:extLst>
             </a:blip>
             <a:stretch>
-              <a:fillRect l="0" t="0" r="0" b="0"/>
+              <a:fillRect/>
             </a:stretch>
           </a:blipFill>
         </p:spPr>
       </p:sp>
       <p:sp>
         <p:nvSpPr>
-          <p:cNvPr name="AutoShape 6" id="6"/>
+          <p:cNvPr id="6" name="AutoShape 6"/>
           <p:cNvSpPr/>
           <p:nvPr/>
         </p:nvSpPr>
@@ -3233,24 +3237,24 @@
           <a:prstGeom prst="line">
             <a:avLst/>
           </a:prstGeom>
-          <a:ln cap="flat" w="9525">
+          <a:ln w="9525" cap="flat">
             <a:solidFill>
               <a:srgbClr val="000000"/>
             </a:solidFill>
             <a:prstDash val="solid"/>
-            <a:headEnd type="none" len="sm" w="sm"/>
-            <a:tailEnd type="none" len="sm" w="sm"/>
+            <a:headEnd type="none" w="sm" len="sm"/>
+            <a:tailEnd type="none" w="sm" len="sm"/>
           </a:ln>
         </p:spPr>
       </p:sp>
       <p:sp>
         <p:nvSpPr>
-          <p:cNvPr name="Freeform 7" id="7"/>
+          <p:cNvPr id="7" name="Freeform 7"/>
           <p:cNvSpPr/>
           <p:nvPr/>
         </p:nvSpPr>
         <p:spPr>
-          <a:xfrm flipH="false" flipV="false" rot="5400000">
+          <a:xfrm rot="5400000">
             <a:off x="-723249" y="2257023"/>
             <a:ext cx="3503898" cy="471434"/>
           </a:xfrm>
@@ -3259,9 +3263,9 @@
             <a:gdLst/>
             <a:ahLst/>
             <a:cxnLst/>
-            <a:rect r="r" b="b" t="t" l="l"/>
+            <a:rect l="l" t="t" r="r" b="b"/>
             <a:pathLst>
-              <a:path h="471434" w="3503898">
+              <a:path w="3503898" h="471434">
                 <a:moveTo>
                   <a:pt x="0" y="0"/>
                 </a:moveTo>
@@ -3290,19 +3294,19 @@
               </a:extLst>
             </a:blip>
             <a:stretch>
-              <a:fillRect l="0" t="0" r="0" b="0"/>
+              <a:fillRect/>
             </a:stretch>
           </a:blipFill>
         </p:spPr>
       </p:sp>
       <p:sp>
         <p:nvSpPr>
-          <p:cNvPr name="TextBox 8" id="8"/>
-          <p:cNvSpPr txBox="true"/>
+          <p:cNvPr id="8" name="TextBox 8"/>
+          <p:cNvSpPr txBox="1"/>
           <p:nvPr/>
         </p:nvSpPr>
         <p:spPr>
-          <a:xfrm rot="0">
+          <a:xfrm>
             <a:off x="2890274" y="740791"/>
             <a:ext cx="1510928" cy="466683"/>
           </a:xfrm>
@@ -3311,12 +3315,12 @@
           </a:prstGeom>
         </p:spPr>
         <p:txBody>
-          <a:bodyPr anchor="t" rtlCol="false" tIns="0" lIns="0" bIns="0" rIns="0">
+          <a:bodyPr lIns="0" tIns="0" rIns="0" bIns="0" rtlCol="0" anchor="t">
             <a:spAutoFit/>
           </a:bodyPr>
           <a:lstStyle/>
           <a:p>
-            <a:pPr algn="l" marL="0" indent="0" lvl="0">
+            <a:pPr marL="0" lvl="0" indent="0" algn="l">
               <a:lnSpc>
                 <a:spcPts val="1883"/>
               </a:lnSpc>
@@ -3335,7 +3339,7 @@
             </a:r>
           </a:p>
           <a:p>
-            <a:pPr algn="l" marL="0" indent="0" lvl="0">
+            <a:pPr marL="0" lvl="0" indent="0" algn="l">
               <a:lnSpc>
                 <a:spcPts val="1883"/>
               </a:lnSpc>
@@ -3357,12 +3361,12 @@
       </p:sp>
       <p:sp>
         <p:nvSpPr>
-          <p:cNvPr name="TextBox 9" id="9"/>
-          <p:cNvSpPr txBox="true"/>
+          <p:cNvPr id="9" name="TextBox 9"/>
+          <p:cNvSpPr txBox="1"/>
           <p:nvPr/>
         </p:nvSpPr>
         <p:spPr>
-          <a:xfrm rot="0">
+          <a:xfrm>
             <a:off x="2890274" y="3536757"/>
             <a:ext cx="9255329" cy="3228444"/>
           </a:xfrm>
@@ -3371,18 +3375,18 @@
           </a:prstGeom>
         </p:spPr>
         <p:txBody>
-          <a:bodyPr anchor="t" rtlCol="false" tIns="0" lIns="0" bIns="0" rIns="0">
+          <a:bodyPr lIns="0" tIns="0" rIns="0" bIns="0" rtlCol="0" anchor="t">
             <a:spAutoFit/>
           </a:bodyPr>
           <a:lstStyle/>
           <a:p>
-            <a:pPr algn="l" marL="0" indent="0" lvl="0">
+            <a:pPr marL="0" lvl="0" indent="0" algn="l">
               <a:lnSpc>
                 <a:spcPts val="8490"/>
               </a:lnSpc>
             </a:pPr>
             <a:r>
-              <a:rPr lang="en-US" b="true" sz="7383">
+              <a:rPr lang="en-US" sz="7383" b="1">
                 <a:solidFill>
                   <a:srgbClr val="000000"/>
                 </a:solidFill>
@@ -3398,12 +3402,12 @@
       </p:sp>
       <p:sp>
         <p:nvSpPr>
-          <p:cNvPr name="TextBox 10" id="10"/>
-          <p:cNvSpPr txBox="true"/>
+          <p:cNvPr id="10" name="TextBox 10"/>
+          <p:cNvSpPr txBox="1"/>
           <p:nvPr/>
         </p:nvSpPr>
         <p:spPr>
-          <a:xfrm rot="0">
+          <a:xfrm>
             <a:off x="2890274" y="7147921"/>
             <a:ext cx="7804538" cy="251268"/>
           </a:xfrm>
@@ -3412,12 +3416,12 @@
           </a:prstGeom>
         </p:spPr>
         <p:txBody>
-          <a:bodyPr anchor="t" rtlCol="false" tIns="0" lIns="0" bIns="0" rIns="0">
+          <a:bodyPr lIns="0" tIns="0" rIns="0" bIns="0" rtlCol="0" anchor="t">
             <a:spAutoFit/>
           </a:bodyPr>
           <a:lstStyle/>
           <a:p>
-            <a:pPr algn="l" marL="0" indent="0" lvl="0">
+            <a:pPr marL="0" lvl="0" indent="0" algn="l">
               <a:lnSpc>
                 <a:spcPts val="2154"/>
               </a:lnSpc>
@@ -3446,13 +3450,14 @@
 </file>
 
 <file path=ppt/slides/slide2.xml><?xml version="1.0" encoding="utf-8"?>
-<p:sld xmlns:p="http://schemas.openxmlformats.org/presentationml/2006/main" xmlns:a="http://schemas.openxmlformats.org/drawingml/2006/main" xmlns:r="http://schemas.openxmlformats.org/officeDocument/2006/relationships">
+<p:sld xmlns:a="http://schemas.openxmlformats.org/drawingml/2006/main" xmlns:r="http://schemas.openxmlformats.org/officeDocument/2006/relationships" xmlns:p="http://schemas.openxmlformats.org/presentationml/2006/main">
   <p:cSld>
     <p:bg>
       <p:bgPr>
         <a:solidFill>
           <a:srgbClr val="92B8DD"/>
         </a:solidFill>
+        <a:effectLst/>
       </p:bgPr>
     </p:bg>
     <p:spTree>
@@ -3471,12 +3476,12 @@
       </p:grpSpPr>
       <p:sp>
         <p:nvSpPr>
-          <p:cNvPr name="Freeform 2" id="2"/>
+          <p:cNvPr id="2" name="Freeform 2"/>
           <p:cNvSpPr/>
           <p:nvPr/>
         </p:nvSpPr>
         <p:spPr>
-          <a:xfrm flipH="false" flipV="false" rot="0">
+          <a:xfrm>
             <a:off x="16653114" y="640862"/>
             <a:ext cx="852752" cy="806917"/>
           </a:xfrm>
@@ -3485,9 +3490,9 @@
             <a:gdLst/>
             <a:ahLst/>
             <a:cxnLst/>
-            <a:rect r="r" b="b" t="t" l="l"/>
+            <a:rect l="l" t="t" r="r" b="b"/>
             <a:pathLst>
-              <a:path h="806917" w="852752">
+              <a:path w="852752" h="806917">
                 <a:moveTo>
                   <a:pt x="0" y="0"/>
                 </a:moveTo>
@@ -3516,19 +3521,19 @@
               </a:extLst>
             </a:blip>
             <a:stretch>
-              <a:fillRect l="0" t="0" r="0" b="0"/>
+              <a:fillRect/>
             </a:stretch>
           </a:blipFill>
         </p:spPr>
       </p:sp>
       <p:grpSp>
         <p:nvGrpSpPr>
-          <p:cNvPr name="Group 3" id="3"/>
+          <p:cNvPr id="3" name="Group 3"/>
           <p:cNvGrpSpPr/>
           <p:nvPr/>
         </p:nvGrpSpPr>
         <p:grpSpPr>
-          <a:xfrm rot="0">
+          <a:xfrm>
             <a:off x="-346689" y="4051379"/>
             <a:ext cx="16999803" cy="6717644"/>
             <a:chOff x="0" y="0"/>
@@ -3537,12 +3542,12 @@
         </p:grpSpPr>
         <p:sp>
           <p:nvSpPr>
-            <p:cNvPr name="Freeform 4" id="4"/>
+            <p:cNvPr id="4" name="Freeform 4"/>
             <p:cNvSpPr/>
             <p:nvPr/>
           </p:nvSpPr>
           <p:spPr>
-            <a:xfrm flipH="false" flipV="false" rot="0">
+            <a:xfrm>
               <a:off x="0" y="0"/>
               <a:ext cx="4477314" cy="1769256"/>
             </a:xfrm>
@@ -3551,9 +3556,9 @@
               <a:gdLst/>
               <a:ahLst/>
               <a:cxnLst/>
-              <a:rect r="r" b="b" t="t" l="l"/>
+              <a:rect l="l" t="t" r="r" b="b"/>
               <a:pathLst>
-                <a:path h="1769256" w="4477314">
+                <a:path w="4477314" h="1769256">
                   <a:moveTo>
                     <a:pt x="0" y="0"/>
                   </a:moveTo>
@@ -3577,8 +3582,8 @@
         </p:sp>
         <p:sp>
           <p:nvSpPr>
-            <p:cNvPr name="TextBox 5" id="5"/>
-            <p:cNvSpPr txBox="true"/>
+            <p:cNvPr id="5" name="TextBox 5"/>
+            <p:cNvSpPr txBox="1"/>
             <p:nvPr/>
           </p:nvSpPr>
           <p:spPr>
@@ -3591,10 +3596,10 @@
             </a:prstGeom>
           </p:spPr>
           <p:txBody>
-            <a:bodyPr anchor="ctr" rtlCol="false" tIns="50800" lIns="50800" bIns="50800" rIns="50800"/>
+            <a:bodyPr lIns="50800" tIns="50800" rIns="50800" bIns="50800" rtlCol="0" anchor="ctr"/>
             <a:lstStyle/>
             <a:p>
-              <a:pPr algn="ctr" marL="0" indent="0" lvl="0">
+              <a:pPr marL="0" lvl="0" indent="0" algn="ctr">
                 <a:lnSpc>
                   <a:spcPts val="2659"/>
                 </a:lnSpc>
@@ -3602,18 +3607,19 @@
                   <a:spcPct val="0"/>
                 </a:spcBef>
               </a:pPr>
+              <a:endParaRPr/>
             </a:p>
           </p:txBody>
         </p:sp>
       </p:grpSp>
       <p:sp>
         <p:nvSpPr>
-          <p:cNvPr name="TextBox 6" id="6"/>
-          <p:cNvSpPr txBox="true"/>
+          <p:cNvPr id="6" name="TextBox 6"/>
+          <p:cNvSpPr txBox="1"/>
           <p:nvPr/>
         </p:nvSpPr>
         <p:spPr>
-          <a:xfrm rot="0">
+          <a:xfrm>
             <a:off x="1028700" y="711200"/>
             <a:ext cx="1510928" cy="532095"/>
           </a:xfrm>
@@ -3622,12 +3628,12 @@
           </a:prstGeom>
         </p:spPr>
         <p:txBody>
-          <a:bodyPr anchor="t" rtlCol="false" tIns="0" lIns="0" bIns="0" rIns="0">
+          <a:bodyPr lIns="0" tIns="0" rIns="0" bIns="0" rtlCol="0" anchor="t">
             <a:spAutoFit/>
           </a:bodyPr>
           <a:lstStyle/>
           <a:p>
-            <a:pPr algn="l" marL="0" indent="0" lvl="0">
+            <a:pPr marL="0" lvl="0" indent="0" algn="l">
               <a:lnSpc>
                 <a:spcPts val="2131"/>
               </a:lnSpc>
@@ -3646,7 +3652,7 @@
             </a:r>
           </a:p>
           <a:p>
-            <a:pPr algn="l" marL="0" indent="0" lvl="0">
+            <a:pPr marL="0" lvl="0" indent="0" algn="l">
               <a:lnSpc>
                 <a:spcPts val="2131"/>
               </a:lnSpc>
@@ -3668,12 +3674,12 @@
       </p:sp>
       <p:sp>
         <p:nvSpPr>
-          <p:cNvPr name="TextBox 7" id="7"/>
-          <p:cNvSpPr txBox="true"/>
+          <p:cNvPr id="7" name="TextBox 7"/>
+          <p:cNvSpPr txBox="1"/>
           <p:nvPr/>
         </p:nvSpPr>
         <p:spPr>
-          <a:xfrm rot="0">
+          <a:xfrm>
             <a:off x="1451734" y="2213087"/>
             <a:ext cx="7929994" cy="1104867"/>
           </a:xfrm>
@@ -3682,18 +3688,18 @@
           </a:prstGeom>
         </p:spPr>
         <p:txBody>
-          <a:bodyPr anchor="t" rtlCol="false" tIns="0" lIns="0" bIns="0" rIns="0">
+          <a:bodyPr lIns="0" tIns="0" rIns="0" bIns="0" rtlCol="0" anchor="t">
             <a:spAutoFit/>
           </a:bodyPr>
           <a:lstStyle/>
           <a:p>
-            <a:pPr algn="l" marL="0" indent="0" lvl="0">
+            <a:pPr marL="0" lvl="0" indent="0" algn="l">
               <a:lnSpc>
                 <a:spcPts val="8618"/>
               </a:lnSpc>
             </a:pPr>
             <a:r>
-              <a:rPr lang="en-US" b="true" sz="7494">
+              <a:rPr lang="en-US" sz="7494" b="1">
                 <a:solidFill>
                   <a:srgbClr val="000000"/>
                 </a:solidFill>
@@ -3709,12 +3715,12 @@
       </p:sp>
       <p:sp>
         <p:nvSpPr>
-          <p:cNvPr name="TextBox 8" id="8"/>
-          <p:cNvSpPr txBox="true"/>
+          <p:cNvPr id="8" name="TextBox 8"/>
+          <p:cNvSpPr txBox="1"/>
           <p:nvPr/>
         </p:nvSpPr>
         <p:spPr>
-          <a:xfrm rot="0">
+          <a:xfrm>
             <a:off x="6114883" y="6500982"/>
             <a:ext cx="3320710" cy="1598895"/>
           </a:xfrm>
@@ -3723,12 +3729,12 @@
           </a:prstGeom>
         </p:spPr>
         <p:txBody>
-          <a:bodyPr anchor="t" rtlCol="false" tIns="0" lIns="0" bIns="0" rIns="0">
+          <a:bodyPr lIns="0" tIns="0" rIns="0" bIns="0" rtlCol="0" anchor="t">
             <a:spAutoFit/>
           </a:bodyPr>
           <a:lstStyle/>
           <a:p>
-            <a:pPr algn="l" marL="0" indent="0" lvl="0">
+            <a:pPr marL="0" lvl="0" indent="0" algn="l">
               <a:lnSpc>
                 <a:spcPts val="2131"/>
               </a:lnSpc>
@@ -3753,12 +3759,12 @@
       </p:sp>
       <p:sp>
         <p:nvSpPr>
-          <p:cNvPr name="TextBox 9" id="9"/>
-          <p:cNvSpPr txBox="true"/>
+          <p:cNvPr id="9" name="TextBox 9"/>
+          <p:cNvSpPr txBox="1"/>
           <p:nvPr/>
         </p:nvSpPr>
         <p:spPr>
-          <a:xfrm rot="0">
+          <a:xfrm>
             <a:off x="12186778" y="6500982"/>
             <a:ext cx="3451392" cy="1332195"/>
           </a:xfrm>
@@ -3767,12 +3773,12 @@
           </a:prstGeom>
         </p:spPr>
         <p:txBody>
-          <a:bodyPr anchor="t" rtlCol="false" tIns="0" lIns="0" bIns="0" rIns="0">
+          <a:bodyPr lIns="0" tIns="0" rIns="0" bIns="0" rtlCol="0" anchor="t">
             <a:spAutoFit/>
           </a:bodyPr>
           <a:lstStyle/>
           <a:p>
-            <a:pPr algn="l" marL="0" indent="0" lvl="0">
+            <a:pPr marL="0" lvl="0" indent="0" algn="l">
               <a:lnSpc>
                 <a:spcPts val="2131"/>
               </a:lnSpc>
@@ -3797,12 +3803,12 @@
       </p:sp>
       <p:sp>
         <p:nvSpPr>
-          <p:cNvPr name="TextBox 10" id="10"/>
-          <p:cNvSpPr txBox="true"/>
+          <p:cNvPr id="10" name="TextBox 10"/>
+          <p:cNvSpPr txBox="1"/>
           <p:nvPr/>
         </p:nvSpPr>
         <p:spPr>
-          <a:xfrm rot="0">
+          <a:xfrm>
             <a:off x="6114883" y="5839272"/>
             <a:ext cx="3956792" cy="289014"/>
           </a:xfrm>
@@ -3811,18 +3817,18 @@
           </a:prstGeom>
         </p:spPr>
         <p:txBody>
-          <a:bodyPr anchor="t" rtlCol="false" tIns="0" lIns="0" bIns="0" rIns="0">
+          <a:bodyPr lIns="0" tIns="0" rIns="0" bIns="0" rtlCol="0" anchor="t">
             <a:spAutoFit/>
           </a:bodyPr>
           <a:lstStyle/>
           <a:p>
-            <a:pPr algn="l" marL="0" indent="0" lvl="0">
+            <a:pPr marL="0" lvl="0" indent="0" algn="l">
               <a:lnSpc>
                 <a:spcPts val="2316"/>
               </a:lnSpc>
             </a:pPr>
             <a:r>
-              <a:rPr lang="en-US" b="true" sz="2014">
+              <a:rPr lang="en-US" sz="2014" b="1">
                 <a:solidFill>
                   <a:srgbClr val="000000"/>
                 </a:solidFill>
@@ -3838,12 +3844,12 @@
       </p:sp>
       <p:sp>
         <p:nvSpPr>
-          <p:cNvPr name="TextBox 11" id="11"/>
-          <p:cNvSpPr txBox="true"/>
+          <p:cNvPr id="11" name="TextBox 11"/>
+          <p:cNvSpPr txBox="1"/>
           <p:nvPr/>
         </p:nvSpPr>
         <p:spPr>
-          <a:xfrm rot="0">
+          <a:xfrm>
             <a:off x="12186778" y="5839272"/>
             <a:ext cx="2324213" cy="289014"/>
           </a:xfrm>
@@ -3852,18 +3858,18 @@
           </a:prstGeom>
         </p:spPr>
         <p:txBody>
-          <a:bodyPr anchor="t" rtlCol="false" tIns="0" lIns="0" bIns="0" rIns="0">
+          <a:bodyPr lIns="0" tIns="0" rIns="0" bIns="0" rtlCol="0" anchor="t">
             <a:spAutoFit/>
           </a:bodyPr>
           <a:lstStyle/>
           <a:p>
-            <a:pPr algn="l" marL="0" indent="0" lvl="0">
+            <a:pPr marL="0" lvl="0" indent="0" algn="l">
               <a:lnSpc>
                 <a:spcPts val="2316"/>
               </a:lnSpc>
             </a:pPr>
             <a:r>
-              <a:rPr lang="en-US" b="true" sz="2014">
+              <a:rPr lang="en-US" sz="2014" b="1">
                 <a:solidFill>
                   <a:srgbClr val="000000"/>
                 </a:solidFill>
@@ -3879,7 +3885,7 @@
       </p:sp>
       <p:sp>
         <p:nvSpPr>
-          <p:cNvPr name="AutoShape 12" id="12"/>
+          <p:cNvPr id="12" name="AutoShape 12"/>
           <p:cNvSpPr/>
           <p:nvPr/>
         </p:nvSpPr>
@@ -3891,19 +3897,19 @@
           <a:prstGeom prst="line">
             <a:avLst/>
           </a:prstGeom>
-          <a:ln cap="flat" w="38100">
+          <a:ln w="38100" cap="flat">
             <a:solidFill>
               <a:srgbClr val="000000"/>
             </a:solidFill>
             <a:prstDash val="solid"/>
-            <a:headEnd type="none" len="sm" w="sm"/>
-            <a:tailEnd type="none" len="sm" w="sm"/>
+            <a:headEnd type="none" w="sm" len="sm"/>
+            <a:tailEnd type="none" w="sm" len="sm"/>
           </a:ln>
         </p:spPr>
       </p:sp>
       <p:sp>
         <p:nvSpPr>
-          <p:cNvPr name="AutoShape 13" id="13"/>
+          <p:cNvPr id="13" name="AutoShape 13"/>
           <p:cNvSpPr/>
           <p:nvPr/>
         </p:nvSpPr>
@@ -3915,19 +3921,19 @@
           <a:prstGeom prst="line">
             <a:avLst/>
           </a:prstGeom>
-          <a:ln cap="flat" w="38100">
+          <a:ln w="38100" cap="flat">
             <a:solidFill>
               <a:srgbClr val="000000"/>
             </a:solidFill>
             <a:prstDash val="solid"/>
-            <a:headEnd type="none" len="sm" w="sm"/>
-            <a:tailEnd type="arrow" len="sm" w="med"/>
+            <a:headEnd type="none" w="sm" len="sm"/>
+            <a:tailEnd type="arrow" w="med" len="sm"/>
           </a:ln>
         </p:spPr>
       </p:sp>
       <p:sp>
         <p:nvSpPr>
-          <p:cNvPr name="AutoShape 14" id="14"/>
+          <p:cNvPr id="14" name="AutoShape 14"/>
           <p:cNvSpPr/>
           <p:nvPr/>
         </p:nvSpPr>
@@ -3939,19 +3945,19 @@
           <a:prstGeom prst="line">
             <a:avLst/>
           </a:prstGeom>
-          <a:ln cap="flat" w="38100">
+          <a:ln w="38100" cap="flat">
             <a:solidFill>
               <a:srgbClr val="000000"/>
             </a:solidFill>
             <a:prstDash val="solid"/>
-            <a:headEnd type="none" len="sm" w="sm"/>
-            <a:tailEnd type="arrow" len="sm" w="med"/>
+            <a:headEnd type="none" w="sm" len="sm"/>
+            <a:tailEnd type="arrow" w="med" len="sm"/>
           </a:ln>
         </p:spPr>
       </p:sp>
       <p:sp>
         <p:nvSpPr>
-          <p:cNvPr name="AutoShape 15" id="15"/>
+          <p:cNvPr id="15" name="AutoShape 15"/>
           <p:cNvSpPr/>
           <p:nvPr/>
         </p:nvSpPr>
@@ -3963,24 +3969,24 @@
           <a:prstGeom prst="line">
             <a:avLst/>
           </a:prstGeom>
-          <a:ln cap="flat" w="38100">
+          <a:ln w="38100" cap="flat">
             <a:solidFill>
               <a:srgbClr val="000000"/>
             </a:solidFill>
             <a:prstDash val="solid"/>
-            <a:headEnd type="none" len="sm" w="sm"/>
-            <a:tailEnd type="arrow" len="sm" w="med"/>
+            <a:headEnd type="none" w="sm" len="sm"/>
+            <a:tailEnd type="arrow" w="med" len="sm"/>
           </a:ln>
         </p:spPr>
       </p:sp>
       <p:sp>
         <p:nvSpPr>
-          <p:cNvPr name="Freeform 16" id="16"/>
+          <p:cNvPr id="16" name="Freeform 16"/>
           <p:cNvSpPr/>
           <p:nvPr/>
         </p:nvSpPr>
         <p:spPr>
-          <a:xfrm flipH="false" flipV="false" rot="0">
+          <a:xfrm>
             <a:off x="13236105" y="2515533"/>
             <a:ext cx="3503898" cy="471434"/>
           </a:xfrm>
@@ -3989,9 +3995,9 @@
             <a:gdLst/>
             <a:ahLst/>
             <a:cxnLst/>
-            <a:rect r="r" b="b" t="t" l="l"/>
+            <a:rect l="l" t="t" r="r" b="b"/>
             <a:pathLst>
-              <a:path h="471434" w="3503898">
+              <a:path w="3503898" h="471434">
                 <a:moveTo>
                   <a:pt x="0" y="0"/>
                 </a:moveTo>
@@ -4020,19 +4026,19 @@
               </a:extLst>
             </a:blip>
             <a:stretch>
-              <a:fillRect l="0" t="0" r="0" b="0"/>
+              <a:fillRect/>
             </a:stretch>
           </a:blipFill>
         </p:spPr>
       </p:sp>
       <p:sp>
         <p:nvSpPr>
-          <p:cNvPr name="TextBox 17" id="17"/>
-          <p:cNvSpPr txBox="true"/>
+          <p:cNvPr id="17" name="TextBox 17"/>
+          <p:cNvSpPr txBox="1"/>
           <p:nvPr/>
         </p:nvSpPr>
         <p:spPr>
-          <a:xfrm rot="0">
+          <a:xfrm>
             <a:off x="1028700" y="6500982"/>
             <a:ext cx="3320710" cy="1332195"/>
           </a:xfrm>
@@ -4041,12 +4047,12 @@
           </a:prstGeom>
         </p:spPr>
         <p:txBody>
-          <a:bodyPr anchor="t" rtlCol="false" tIns="0" lIns="0" bIns="0" rIns="0">
+          <a:bodyPr lIns="0" tIns="0" rIns="0" bIns="0" rtlCol="0" anchor="t">
             <a:spAutoFit/>
           </a:bodyPr>
           <a:lstStyle/>
           <a:p>
-            <a:pPr algn="l" marL="0" indent="0" lvl="0">
+            <a:pPr marL="0" lvl="0" indent="0" algn="l">
               <a:lnSpc>
                 <a:spcPts val="2131"/>
               </a:lnSpc>
@@ -4064,31 +4070,19 @@
                 <a:cs typeface="TT Hoves"/>
                 <a:sym typeface="TT Hoves"/>
               </a:rPr>
-              <a:t>IS</a:t>
-            </a:r>
-            <a:r>
-              <a:rPr lang="en-US" sz="1705">
-                <a:solidFill>
-                  <a:srgbClr val="000000"/>
-                </a:solidFill>
-                <a:latin typeface="TT Hoves"/>
-                <a:ea typeface="TT Hoves"/>
-                <a:cs typeface="TT Hoves"/>
-                <a:sym typeface="TT Hoves"/>
-              </a:rPr>
-              <a:t>tart the day by greeting my colleagues, grabbing a fresh coffee, going to my desk, turning on my computer, and connecting to the server.</a:t>
-            </a:r>
-          </a:p>
-        </p:txBody>
-      </p:sp>
-      <p:sp>
-        <p:nvSpPr>
-          <p:cNvPr name="TextBox 18" id="18"/>
-          <p:cNvSpPr txBox="true"/>
+              <a:t>IStart the day by greeting my colleagues, grabbing a fresh coffee, going to my desk, turning on my computer, and connecting to the server.</a:t>
+            </a:r>
+          </a:p>
+        </p:txBody>
+      </p:sp>
+      <p:sp>
+        <p:nvSpPr>
+          <p:cNvPr id="18" name="TextBox 18"/>
+          <p:cNvSpPr txBox="1"/>
           <p:nvPr/>
         </p:nvSpPr>
         <p:spPr>
-          <a:xfrm rot="0">
+          <a:xfrm>
             <a:off x="1028700" y="5839272"/>
             <a:ext cx="3956792" cy="289014"/>
           </a:xfrm>
@@ -4097,18 +4091,18 @@
           </a:prstGeom>
         </p:spPr>
         <p:txBody>
-          <a:bodyPr anchor="t" rtlCol="false" tIns="0" lIns="0" bIns="0" rIns="0">
+          <a:bodyPr lIns="0" tIns="0" rIns="0" bIns="0" rtlCol="0" anchor="t">
             <a:spAutoFit/>
           </a:bodyPr>
           <a:lstStyle/>
           <a:p>
-            <a:pPr algn="l" marL="0" indent="0" lvl="0">
+            <a:pPr marL="0" lvl="0" indent="0" algn="l">
               <a:lnSpc>
                 <a:spcPts val="2316"/>
               </a:lnSpc>
             </a:pPr>
             <a:r>
-              <a:rPr lang="en-US" b="true" sz="2014">
+              <a:rPr lang="en-US" sz="2014" b="1">
                 <a:solidFill>
                   <a:srgbClr val="000000"/>
                 </a:solidFill>
@@ -4131,7 +4125,7 @@
 </file>
 
 <file path=ppt/slides/slide3.xml><?xml version="1.0" encoding="utf-8"?>
-<p:sld xmlns:p="http://schemas.openxmlformats.org/presentationml/2006/main" xmlns:a="http://schemas.openxmlformats.org/drawingml/2006/main" xmlns:r="http://schemas.openxmlformats.org/officeDocument/2006/relationships">
+<p:sld xmlns:a="http://schemas.openxmlformats.org/drawingml/2006/main" xmlns:r="http://schemas.openxmlformats.org/officeDocument/2006/relationships" xmlns:p="http://schemas.openxmlformats.org/presentationml/2006/main">
   <p:cSld>
     <p:spTree>
       <p:nvGrpSpPr>
@@ -4149,12 +4143,12 @@
       </p:grpSpPr>
       <p:grpSp>
         <p:nvGrpSpPr>
-          <p:cNvPr name="Group 2" id="2"/>
+          <p:cNvPr id="2" name="Group 2"/>
           <p:cNvGrpSpPr/>
           <p:nvPr/>
         </p:nvGrpSpPr>
         <p:grpSpPr>
-          <a:xfrm rot="0">
+          <a:xfrm>
             <a:off x="6004456" y="302716"/>
             <a:ext cx="13451137" cy="1483210"/>
             <a:chOff x="0" y="0"/>
@@ -4163,12 +4157,12 @@
         </p:grpSpPr>
         <p:sp>
           <p:nvSpPr>
-            <p:cNvPr name="Freeform 3" id="3"/>
+            <p:cNvPr id="3" name="Freeform 3"/>
             <p:cNvSpPr/>
             <p:nvPr/>
           </p:nvSpPr>
           <p:spPr>
-            <a:xfrm flipH="false" flipV="false" rot="0">
+            <a:xfrm>
               <a:off x="0" y="0"/>
               <a:ext cx="3542686" cy="390640"/>
             </a:xfrm>
@@ -4177,9 +4171,9 @@
               <a:gdLst/>
               <a:ahLst/>
               <a:cxnLst/>
-              <a:rect r="r" b="b" t="t" l="l"/>
+              <a:rect l="l" t="t" r="r" b="b"/>
               <a:pathLst>
-                <a:path h="390640" w="3542686">
+                <a:path w="3542686" h="390640">
                   <a:moveTo>
                     <a:pt x="57556" y="0"/>
                   </a:moveTo>
@@ -4226,8 +4220,8 @@
         </p:sp>
         <p:sp>
           <p:nvSpPr>
-            <p:cNvPr name="TextBox 4" id="4"/>
-            <p:cNvSpPr txBox="true"/>
+            <p:cNvPr id="4" name="TextBox 4"/>
+            <p:cNvSpPr txBox="1"/>
             <p:nvPr/>
           </p:nvSpPr>
           <p:spPr>
@@ -4240,26 +4234,27 @@
             </a:prstGeom>
           </p:spPr>
           <p:txBody>
-            <a:bodyPr anchor="ctr" rtlCol="false" tIns="50800" lIns="50800" bIns="50800" rIns="50800"/>
+            <a:bodyPr lIns="50800" tIns="50800" rIns="50800" bIns="50800" rtlCol="0" anchor="ctr"/>
             <a:lstStyle/>
             <a:p>
-              <a:pPr algn="ctr" marL="0" indent="0" lvl="0">
+              <a:pPr marL="0" lvl="0" indent="0" algn="ctr">
                 <a:lnSpc>
                   <a:spcPts val="2500"/>
                 </a:lnSpc>
               </a:pPr>
+              <a:endParaRPr/>
             </a:p>
           </p:txBody>
         </p:sp>
       </p:grpSp>
       <p:sp>
         <p:nvSpPr>
-          <p:cNvPr name="Freeform 5" id="5"/>
+          <p:cNvPr id="5" name="Freeform 5"/>
           <p:cNvSpPr/>
           <p:nvPr/>
         </p:nvSpPr>
         <p:spPr>
-          <a:xfrm flipH="false" flipV="false" rot="0">
+          <a:xfrm>
             <a:off x="16653114" y="640862"/>
             <a:ext cx="852752" cy="806917"/>
           </a:xfrm>
@@ -4268,9 +4263,9 @@
             <a:gdLst/>
             <a:ahLst/>
             <a:cxnLst/>
-            <a:rect r="r" b="b" t="t" l="l"/>
+            <a:rect l="l" t="t" r="r" b="b"/>
             <a:pathLst>
-              <a:path h="806917" w="852752">
+              <a:path w="852752" h="806917">
                 <a:moveTo>
                   <a:pt x="0" y="0"/>
                 </a:moveTo>
@@ -4299,19 +4294,19 @@
               </a:extLst>
             </a:blip>
             <a:stretch>
-              <a:fillRect l="0" t="0" r="0" b="0"/>
+              <a:fillRect/>
             </a:stretch>
           </a:blipFill>
         </p:spPr>
       </p:sp>
       <p:sp>
         <p:nvSpPr>
-          <p:cNvPr name="Freeform 6" id="6"/>
+          <p:cNvPr id="6" name="Freeform 6"/>
           <p:cNvSpPr/>
           <p:nvPr/>
         </p:nvSpPr>
         <p:spPr>
-          <a:xfrm flipH="false" flipV="false" rot="0">
+          <a:xfrm>
             <a:off x="1028700" y="8786866"/>
             <a:ext cx="3503898" cy="471434"/>
           </a:xfrm>
@@ -4320,9 +4315,9 @@
             <a:gdLst/>
             <a:ahLst/>
             <a:cxnLst/>
-            <a:rect r="r" b="b" t="t" l="l"/>
+            <a:rect l="l" t="t" r="r" b="b"/>
             <a:pathLst>
-              <a:path h="471434" w="3503898">
+              <a:path w="3503898" h="471434">
                 <a:moveTo>
                   <a:pt x="0" y="0"/>
                 </a:moveTo>
@@ -4351,19 +4346,19 @@
               </a:extLst>
             </a:blip>
             <a:stretch>
-              <a:fillRect l="0" t="0" r="0" b="0"/>
+              <a:fillRect/>
             </a:stretch>
           </a:blipFill>
         </p:spPr>
       </p:sp>
       <p:grpSp>
         <p:nvGrpSpPr>
-          <p:cNvPr name="Group 7" id="7"/>
+          <p:cNvPr id="7" name="Group 7"/>
           <p:cNvGrpSpPr/>
           <p:nvPr/>
         </p:nvGrpSpPr>
         <p:grpSpPr>
-          <a:xfrm rot="0">
+          <a:xfrm>
             <a:off x="2419553" y="4160232"/>
             <a:ext cx="3086100" cy="3086100"/>
             <a:chOff x="0" y="0"/>
@@ -4372,12 +4367,12 @@
         </p:grpSpPr>
         <p:sp>
           <p:nvSpPr>
-            <p:cNvPr name="Freeform 8" id="8"/>
+            <p:cNvPr id="8" name="Freeform 8"/>
             <p:cNvSpPr/>
             <p:nvPr/>
           </p:nvSpPr>
           <p:spPr>
-            <a:xfrm flipH="false" flipV="false" rot="0">
+            <a:xfrm>
               <a:off x="0" y="0"/>
               <a:ext cx="812800" cy="812800"/>
             </a:xfrm>
@@ -4386,9 +4381,9 @@
               <a:gdLst/>
               <a:ahLst/>
               <a:cxnLst/>
-              <a:rect r="r" b="b" t="t" l="l"/>
+              <a:rect l="l" t="t" r="r" b="b"/>
               <a:pathLst>
-                <a:path h="812800" w="812800">
+                <a:path w="812800" h="812800">
                   <a:moveTo>
                     <a:pt x="0" y="0"/>
                   </a:moveTo>
@@ -4412,8 +4407,8 @@
         </p:sp>
         <p:sp>
           <p:nvSpPr>
-            <p:cNvPr name="TextBox 9" id="9"/>
-            <p:cNvSpPr txBox="true"/>
+            <p:cNvPr id="9" name="TextBox 9"/>
+            <p:cNvSpPr txBox="1"/>
             <p:nvPr/>
           </p:nvSpPr>
           <p:spPr>
@@ -4426,7 +4421,7 @@
             </a:prstGeom>
           </p:spPr>
           <p:txBody>
-            <a:bodyPr anchor="ctr" rtlCol="false" tIns="50800" lIns="50800" bIns="50800" rIns="50800"/>
+            <a:bodyPr lIns="50800" tIns="50800" rIns="50800" bIns="50800" rtlCol="0" anchor="ctr"/>
             <a:lstStyle/>
             <a:p>
               <a:pPr algn="ctr">
@@ -4452,12 +4447,12 @@
       </p:grpSp>
       <p:grpSp>
         <p:nvGrpSpPr>
-          <p:cNvPr name="Group 10" id="10"/>
+          <p:cNvPr id="10" name="Group 10"/>
           <p:cNvGrpSpPr/>
           <p:nvPr/>
         </p:nvGrpSpPr>
         <p:grpSpPr>
-          <a:xfrm rot="0">
+          <a:xfrm>
             <a:off x="7487471" y="4160232"/>
             <a:ext cx="3086100" cy="3086100"/>
             <a:chOff x="0" y="0"/>
@@ -4466,12 +4461,12 @@
         </p:grpSpPr>
         <p:sp>
           <p:nvSpPr>
-            <p:cNvPr name="Freeform 11" id="11"/>
+            <p:cNvPr id="11" name="Freeform 11"/>
             <p:cNvSpPr/>
             <p:nvPr/>
           </p:nvSpPr>
           <p:spPr>
-            <a:xfrm flipH="false" flipV="false" rot="0">
+            <a:xfrm>
               <a:off x="0" y="0"/>
               <a:ext cx="812800" cy="812800"/>
             </a:xfrm>
@@ -4480,9 +4475,9 @@
               <a:gdLst/>
               <a:ahLst/>
               <a:cxnLst/>
-              <a:rect r="r" b="b" t="t" l="l"/>
+              <a:rect l="l" t="t" r="r" b="b"/>
               <a:pathLst>
-                <a:path h="812800" w="812800">
+                <a:path w="812800" h="812800">
                   <a:moveTo>
                     <a:pt x="0" y="0"/>
                   </a:moveTo>
@@ -4506,8 +4501,8 @@
         </p:sp>
         <p:sp>
           <p:nvSpPr>
-            <p:cNvPr name="TextBox 12" id="12"/>
-            <p:cNvSpPr txBox="true"/>
+            <p:cNvPr id="12" name="TextBox 12"/>
+            <p:cNvSpPr txBox="1"/>
             <p:nvPr/>
           </p:nvSpPr>
           <p:spPr>
@@ -4520,7 +4515,7 @@
             </a:prstGeom>
           </p:spPr>
           <p:txBody>
-            <a:bodyPr anchor="ctr" rtlCol="false" tIns="50800" lIns="50800" bIns="50800" rIns="50800"/>
+            <a:bodyPr lIns="50800" tIns="50800" rIns="50800" bIns="50800" rtlCol="0" anchor="ctr"/>
             <a:lstStyle/>
             <a:p>
               <a:pPr algn="ctr">
@@ -4546,12 +4541,12 @@
       </p:grpSp>
       <p:grpSp>
         <p:nvGrpSpPr>
-          <p:cNvPr name="Group 13" id="13"/>
+          <p:cNvPr id="13" name="Group 13"/>
           <p:cNvGrpSpPr/>
           <p:nvPr/>
         </p:nvGrpSpPr>
         <p:grpSpPr>
-          <a:xfrm rot="0">
+          <a:xfrm>
             <a:off x="12554771" y="4160232"/>
             <a:ext cx="3086100" cy="3086100"/>
             <a:chOff x="0" y="0"/>
@@ -4560,12 +4555,12 @@
         </p:grpSpPr>
         <p:sp>
           <p:nvSpPr>
-            <p:cNvPr name="Freeform 14" id="14"/>
+            <p:cNvPr id="14" name="Freeform 14"/>
             <p:cNvSpPr/>
             <p:nvPr/>
           </p:nvSpPr>
           <p:spPr>
-            <a:xfrm flipH="false" flipV="false" rot="0">
+            <a:xfrm>
               <a:off x="0" y="0"/>
               <a:ext cx="812800" cy="812800"/>
             </a:xfrm>
@@ -4574,9 +4569,9 @@
               <a:gdLst/>
               <a:ahLst/>
               <a:cxnLst/>
-              <a:rect r="r" b="b" t="t" l="l"/>
+              <a:rect l="l" t="t" r="r" b="b"/>
               <a:pathLst>
-                <a:path h="812800" w="812800">
+                <a:path w="812800" h="812800">
                   <a:moveTo>
                     <a:pt x="0" y="0"/>
                   </a:moveTo>
@@ -4600,8 +4595,8 @@
         </p:sp>
         <p:sp>
           <p:nvSpPr>
-            <p:cNvPr name="TextBox 15" id="15"/>
-            <p:cNvSpPr txBox="true"/>
+            <p:cNvPr id="15" name="TextBox 15"/>
+            <p:cNvSpPr txBox="1"/>
             <p:nvPr/>
           </p:nvSpPr>
           <p:spPr>
@@ -4614,7 +4609,7 @@
             </a:prstGeom>
           </p:spPr>
           <p:txBody>
-            <a:bodyPr anchor="ctr" rtlCol="false" tIns="50800" lIns="50800" bIns="50800" rIns="50800"/>
+            <a:bodyPr lIns="50800" tIns="50800" rIns="50800" bIns="50800" rtlCol="0" anchor="ctr"/>
             <a:lstStyle/>
             <a:p>
               <a:pPr algn="ctr">
@@ -4640,12 +4635,12 @@
       </p:grpSp>
       <p:sp>
         <p:nvSpPr>
-          <p:cNvPr name="TextBox 16" id="16"/>
-          <p:cNvSpPr txBox="true"/>
+          <p:cNvPr id="16" name="TextBox 16"/>
+          <p:cNvSpPr txBox="1"/>
           <p:nvPr/>
         </p:nvSpPr>
         <p:spPr>
-          <a:xfrm rot="0">
+          <a:xfrm>
             <a:off x="6535227" y="490554"/>
             <a:ext cx="7721399" cy="1104867"/>
           </a:xfrm>
@@ -4654,18 +4649,18 @@
           </a:prstGeom>
         </p:spPr>
         <p:txBody>
-          <a:bodyPr anchor="t" rtlCol="false" tIns="0" lIns="0" bIns="0" rIns="0">
+          <a:bodyPr lIns="0" tIns="0" rIns="0" bIns="0" rtlCol="0" anchor="t">
             <a:spAutoFit/>
           </a:bodyPr>
           <a:lstStyle/>
           <a:p>
-            <a:pPr algn="ctr" marL="0" indent="0" lvl="0">
+            <a:pPr marL="0" lvl="0" indent="0" algn="ctr">
               <a:lnSpc>
                 <a:spcPts val="8618"/>
               </a:lnSpc>
             </a:pPr>
             <a:r>
-              <a:rPr lang="en-US" b="true" sz="7494">
+              <a:rPr lang="en-US" sz="7494" b="1">
                 <a:solidFill>
                   <a:srgbClr val="000000"/>
                 </a:solidFill>
@@ -4681,12 +4676,12 @@
       </p:sp>
       <p:sp>
         <p:nvSpPr>
-          <p:cNvPr name="TextBox 17" id="17"/>
-          <p:cNvSpPr txBox="true"/>
+          <p:cNvPr id="17" name="TextBox 17"/>
+          <p:cNvSpPr txBox="1"/>
           <p:nvPr/>
         </p:nvSpPr>
         <p:spPr>
-          <a:xfrm rot="0">
+          <a:xfrm>
             <a:off x="1028700" y="711200"/>
             <a:ext cx="1510928" cy="625484"/>
           </a:xfrm>
@@ -4695,12 +4690,12 @@
           </a:prstGeom>
         </p:spPr>
         <p:txBody>
-          <a:bodyPr anchor="t" rtlCol="false" tIns="0" lIns="0" bIns="0" rIns="0">
+          <a:bodyPr lIns="0" tIns="0" rIns="0" bIns="0" rtlCol="0" anchor="t">
             <a:spAutoFit/>
           </a:bodyPr>
           <a:lstStyle/>
           <a:p>
-            <a:pPr algn="l" marL="0" indent="0" lvl="0">
+            <a:pPr marL="0" lvl="0" indent="0" algn="l">
               <a:lnSpc>
                 <a:spcPts val="2498"/>
               </a:lnSpc>
@@ -4729,7 +4724,7 @@
 </file>
 
 <file path=ppt/slides/slide4.xml><?xml version="1.0" encoding="utf-8"?>
-<p:sld xmlns:p="http://schemas.openxmlformats.org/presentationml/2006/main" xmlns:a="http://schemas.openxmlformats.org/drawingml/2006/main" xmlns:r="http://schemas.openxmlformats.org/officeDocument/2006/relationships">
+<p:sld xmlns:a="http://schemas.openxmlformats.org/drawingml/2006/main" xmlns:r="http://schemas.openxmlformats.org/officeDocument/2006/relationships" xmlns:p="http://schemas.openxmlformats.org/presentationml/2006/main">
   <p:cSld>
     <p:spTree>
       <p:nvGrpSpPr>
@@ -4747,12 +4742,12 @@
       </p:grpSpPr>
       <p:grpSp>
         <p:nvGrpSpPr>
-          <p:cNvPr name="Group 2" id="2"/>
+          <p:cNvPr id="2" name="Group 2"/>
           <p:cNvGrpSpPr/>
           <p:nvPr/>
         </p:nvGrpSpPr>
         <p:grpSpPr>
-          <a:xfrm rot="0">
+          <a:xfrm>
             <a:off x="5580869" y="3085557"/>
             <a:ext cx="13451137" cy="1483210"/>
             <a:chOff x="0" y="0"/>
@@ -4761,12 +4756,12 @@
         </p:grpSpPr>
         <p:sp>
           <p:nvSpPr>
-            <p:cNvPr name="Freeform 3" id="3"/>
+            <p:cNvPr id="3" name="Freeform 3"/>
             <p:cNvSpPr/>
             <p:nvPr/>
           </p:nvSpPr>
           <p:spPr>
-            <a:xfrm flipH="false" flipV="false" rot="0">
+            <a:xfrm>
               <a:off x="0" y="0"/>
               <a:ext cx="3542686" cy="390640"/>
             </a:xfrm>
@@ -4775,9 +4770,9 @@
               <a:gdLst/>
               <a:ahLst/>
               <a:cxnLst/>
-              <a:rect r="r" b="b" t="t" l="l"/>
+              <a:rect l="l" t="t" r="r" b="b"/>
               <a:pathLst>
-                <a:path h="390640" w="3542686">
+                <a:path w="3542686" h="390640">
                   <a:moveTo>
                     <a:pt x="57556" y="0"/>
                   </a:moveTo>
@@ -4824,8 +4819,8 @@
         </p:sp>
         <p:sp>
           <p:nvSpPr>
-            <p:cNvPr name="TextBox 4" id="4"/>
-            <p:cNvSpPr txBox="true"/>
+            <p:cNvPr id="4" name="TextBox 4"/>
+            <p:cNvSpPr txBox="1"/>
             <p:nvPr/>
           </p:nvSpPr>
           <p:spPr>
@@ -4838,26 +4833,27 @@
             </a:prstGeom>
           </p:spPr>
           <p:txBody>
-            <a:bodyPr anchor="ctr" rtlCol="false" tIns="50800" lIns="50800" bIns="50800" rIns="50800"/>
+            <a:bodyPr lIns="50800" tIns="50800" rIns="50800" bIns="50800" rtlCol="0" anchor="ctr"/>
             <a:lstStyle/>
             <a:p>
-              <a:pPr algn="ctr" marL="0" indent="0" lvl="0">
+              <a:pPr marL="0" lvl="0" indent="0" algn="ctr">
                 <a:lnSpc>
                   <a:spcPts val="2500"/>
                 </a:lnSpc>
               </a:pPr>
+              <a:endParaRPr/>
             </a:p>
           </p:txBody>
         </p:sp>
       </p:grpSp>
       <p:sp>
         <p:nvSpPr>
-          <p:cNvPr name="TextBox 5" id="5"/>
-          <p:cNvSpPr txBox="true"/>
+          <p:cNvPr id="5" name="TextBox 5"/>
+          <p:cNvSpPr txBox="1"/>
           <p:nvPr/>
         </p:nvSpPr>
         <p:spPr>
-          <a:xfrm rot="0">
+          <a:xfrm>
             <a:off x="5283301" y="3289000"/>
             <a:ext cx="7721399" cy="1104867"/>
           </a:xfrm>
@@ -4866,18 +4862,18 @@
           </a:prstGeom>
         </p:spPr>
         <p:txBody>
-          <a:bodyPr anchor="t" rtlCol="false" tIns="0" lIns="0" bIns="0" rIns="0">
+          <a:bodyPr lIns="0" tIns="0" rIns="0" bIns="0" rtlCol="0" anchor="t">
             <a:spAutoFit/>
           </a:bodyPr>
           <a:lstStyle/>
           <a:p>
-            <a:pPr algn="ctr" marL="0" indent="0" lvl="0">
+            <a:pPr marL="0" lvl="0" indent="0" algn="ctr">
               <a:lnSpc>
                 <a:spcPts val="8618"/>
               </a:lnSpc>
             </a:pPr>
             <a:r>
-              <a:rPr lang="en-US" b="true" sz="7494">
+              <a:rPr lang="en-US" sz="7494" b="1">
                 <a:solidFill>
                   <a:srgbClr val="000000"/>
                 </a:solidFill>
@@ -4893,12 +4889,12 @@
       </p:sp>
       <p:sp>
         <p:nvSpPr>
-          <p:cNvPr name="TextBox 6" id="6"/>
-          <p:cNvSpPr txBox="true"/>
+          <p:cNvPr id="6" name="TextBox 6"/>
+          <p:cNvSpPr txBox="1"/>
           <p:nvPr/>
         </p:nvSpPr>
         <p:spPr>
-          <a:xfrm rot="0">
+          <a:xfrm>
             <a:off x="4031375" y="5133975"/>
             <a:ext cx="10225251" cy="1568459"/>
           </a:xfrm>
@@ -4907,12 +4903,12 @@
           </a:prstGeom>
         </p:spPr>
         <p:txBody>
-          <a:bodyPr anchor="t" rtlCol="false" tIns="0" lIns="0" bIns="0" rIns="0">
+          <a:bodyPr lIns="0" tIns="0" rIns="0" bIns="0" rtlCol="0" anchor="t">
             <a:spAutoFit/>
           </a:bodyPr>
           <a:lstStyle/>
           <a:p>
-            <a:pPr algn="ctr" marL="0" indent="0" lvl="0">
+            <a:pPr marL="0" lvl="0" indent="0" algn="ctr">
               <a:lnSpc>
                 <a:spcPts val="2498"/>
               </a:lnSpc>
@@ -4937,12 +4933,12 @@
       </p:sp>
       <p:sp>
         <p:nvSpPr>
-          <p:cNvPr name="TextBox 7" id="7"/>
-          <p:cNvSpPr txBox="true"/>
+          <p:cNvPr id="7" name="TextBox 7"/>
+          <p:cNvSpPr txBox="1"/>
           <p:nvPr/>
         </p:nvSpPr>
         <p:spPr>
-          <a:xfrm rot="0">
+          <a:xfrm>
             <a:off x="1028700" y="711200"/>
             <a:ext cx="1510928" cy="625484"/>
           </a:xfrm>
@@ -4951,12 +4947,12 @@
           </a:prstGeom>
         </p:spPr>
         <p:txBody>
-          <a:bodyPr anchor="t" rtlCol="false" tIns="0" lIns="0" bIns="0" rIns="0">
+          <a:bodyPr lIns="0" tIns="0" rIns="0" bIns="0" rtlCol="0" anchor="t">
             <a:spAutoFit/>
           </a:bodyPr>
           <a:lstStyle/>
           <a:p>
-            <a:pPr algn="l" marL="0" indent="0" lvl="0">
+            <a:pPr marL="0" lvl="0" indent="0" algn="l">
               <a:lnSpc>
                 <a:spcPts val="2498"/>
               </a:lnSpc>
@@ -4975,7 +4971,7 @@
             </a:r>
           </a:p>
           <a:p>
-            <a:pPr algn="l" marL="0" indent="0" lvl="0">
+            <a:pPr marL="0" lvl="0" indent="0" algn="l">
               <a:lnSpc>
                 <a:spcPts val="2498"/>
               </a:lnSpc>
@@ -4997,12 +4993,12 @@
       </p:sp>
       <p:sp>
         <p:nvSpPr>
-          <p:cNvPr name="Freeform 8" id="8"/>
+          <p:cNvPr id="8" name="Freeform 8"/>
           <p:cNvSpPr/>
           <p:nvPr/>
         </p:nvSpPr>
         <p:spPr>
-          <a:xfrm flipH="false" flipV="false" rot="0">
+          <a:xfrm>
             <a:off x="16653114" y="640862"/>
             <a:ext cx="852752" cy="806917"/>
           </a:xfrm>
@@ -5011,9 +5007,9 @@
             <a:gdLst/>
             <a:ahLst/>
             <a:cxnLst/>
-            <a:rect r="r" b="b" t="t" l="l"/>
+            <a:rect l="l" t="t" r="r" b="b"/>
             <a:pathLst>
-              <a:path h="806917" w="852752">
+              <a:path w="852752" h="806917">
                 <a:moveTo>
                   <a:pt x="0" y="0"/>
                 </a:moveTo>
@@ -5042,19 +5038,19 @@
               </a:extLst>
             </a:blip>
             <a:stretch>
-              <a:fillRect l="0" t="0" r="0" b="0"/>
+              <a:fillRect/>
             </a:stretch>
           </a:blipFill>
         </p:spPr>
       </p:sp>
       <p:sp>
         <p:nvSpPr>
-          <p:cNvPr name="Freeform 9" id="9"/>
+          <p:cNvPr id="9" name="Freeform 9"/>
           <p:cNvSpPr/>
           <p:nvPr/>
         </p:nvSpPr>
         <p:spPr>
-          <a:xfrm flipH="false" flipV="false" rot="0">
+          <a:xfrm>
             <a:off x="1028700" y="8786866"/>
             <a:ext cx="3503898" cy="471434"/>
           </a:xfrm>
@@ -5063,9 +5059,9 @@
             <a:gdLst/>
             <a:ahLst/>
             <a:cxnLst/>
-            <a:rect r="r" b="b" t="t" l="l"/>
+            <a:rect l="l" t="t" r="r" b="b"/>
             <a:pathLst>
-              <a:path h="471434" w="3503898">
+              <a:path w="3503898" h="471434">
                 <a:moveTo>
                   <a:pt x="0" y="0"/>
                 </a:moveTo>
@@ -5094,7 +5090,7 @@
               </a:extLst>
             </a:blip>
             <a:stretch>
-              <a:fillRect l="0" t="0" r="0" b="0"/>
+              <a:fillRect/>
             </a:stretch>
           </a:blipFill>
         </p:spPr>
@@ -5108,13 +5104,14 @@
 </file>
 
 <file path=ppt/slides/slide5.xml><?xml version="1.0" encoding="utf-8"?>
-<p:sld xmlns:p="http://schemas.openxmlformats.org/presentationml/2006/main" xmlns:a="http://schemas.openxmlformats.org/drawingml/2006/main" xmlns:r="http://schemas.openxmlformats.org/officeDocument/2006/relationships">
+<p:sld xmlns:a="http://schemas.openxmlformats.org/drawingml/2006/main" xmlns:r="http://schemas.openxmlformats.org/officeDocument/2006/relationships" xmlns:p="http://schemas.openxmlformats.org/presentationml/2006/main">
   <p:cSld>
     <p:bg>
       <p:bgPr>
         <a:solidFill>
           <a:srgbClr val="92B8DD"/>
         </a:solidFill>
+        <a:effectLst/>
       </p:bgPr>
     </p:bg>
     <p:spTree>
@@ -5133,12 +5130,12 @@
       </p:grpSpPr>
       <p:sp>
         <p:nvSpPr>
-          <p:cNvPr name="TextBox 2" id="2"/>
-          <p:cNvSpPr txBox="true"/>
+          <p:cNvPr id="2" name="TextBox 2"/>
+          <p:cNvSpPr txBox="1"/>
           <p:nvPr/>
         </p:nvSpPr>
         <p:spPr>
-          <a:xfrm rot="0">
+          <a:xfrm>
             <a:off x="1298646" y="2164500"/>
             <a:ext cx="7665808" cy="2190717"/>
           </a:xfrm>
@@ -5147,18 +5144,18 @@
           </a:prstGeom>
         </p:spPr>
         <p:txBody>
-          <a:bodyPr anchor="t" rtlCol="false" tIns="0" lIns="0" bIns="0" rIns="0">
+          <a:bodyPr lIns="0" tIns="0" rIns="0" bIns="0" rtlCol="0" anchor="t">
             <a:spAutoFit/>
           </a:bodyPr>
           <a:lstStyle/>
           <a:p>
-            <a:pPr algn="l" marL="0" indent="0" lvl="0">
+            <a:pPr marL="0" lvl="0" indent="0" algn="l">
               <a:lnSpc>
                 <a:spcPts val="8618"/>
               </a:lnSpc>
             </a:pPr>
             <a:r>
-              <a:rPr lang="en-US" b="true" sz="7494">
+              <a:rPr lang="en-US" sz="7494" b="1">
                 <a:solidFill>
                   <a:srgbClr val="000000"/>
                 </a:solidFill>
@@ -5174,12 +5171,12 @@
       </p:sp>
       <p:sp>
         <p:nvSpPr>
-          <p:cNvPr name="TextBox 3" id="3"/>
-          <p:cNvSpPr txBox="true"/>
+          <p:cNvPr id="3" name="TextBox 3"/>
+          <p:cNvSpPr txBox="1"/>
           <p:nvPr/>
         </p:nvSpPr>
         <p:spPr>
-          <a:xfrm rot="0">
+          <a:xfrm>
             <a:off x="1028700" y="720725"/>
             <a:ext cx="1510928" cy="761227"/>
           </a:xfrm>
@@ -5188,12 +5185,12 @@
           </a:prstGeom>
         </p:spPr>
         <p:txBody>
-          <a:bodyPr anchor="t" rtlCol="false" tIns="0" lIns="0" bIns="0" rIns="0">
+          <a:bodyPr lIns="0" tIns="0" rIns="0" bIns="0" rtlCol="0" anchor="t">
             <a:spAutoFit/>
           </a:bodyPr>
           <a:lstStyle/>
           <a:p>
-            <a:pPr algn="l" marL="0" indent="0" lvl="0">
+            <a:pPr marL="0" lvl="0" indent="0" algn="l">
               <a:lnSpc>
                 <a:spcPts val="2027"/>
               </a:lnSpc>
@@ -5212,7 +5209,7 @@
             </a:r>
           </a:p>
           <a:p>
-            <a:pPr algn="l" marL="0" indent="0" lvl="0">
+            <a:pPr marL="0" lvl="0" indent="0" algn="l">
               <a:lnSpc>
                 <a:spcPts val="2027"/>
               </a:lnSpc>
@@ -5234,12 +5231,12 @@
       </p:sp>
       <p:sp>
         <p:nvSpPr>
-          <p:cNvPr name="Freeform 4" id="4"/>
+          <p:cNvPr id="4" name="Freeform 4"/>
           <p:cNvSpPr/>
           <p:nvPr/>
         </p:nvSpPr>
         <p:spPr>
-          <a:xfrm flipH="false" flipV="false" rot="0">
+          <a:xfrm>
             <a:off x="16653114" y="640862"/>
             <a:ext cx="852752" cy="806917"/>
           </a:xfrm>
@@ -5248,9 +5245,9 @@
             <a:gdLst/>
             <a:ahLst/>
             <a:cxnLst/>
-            <a:rect r="r" b="b" t="t" l="l"/>
+            <a:rect l="l" t="t" r="r" b="b"/>
             <a:pathLst>
-              <a:path h="806917" w="852752">
+              <a:path w="852752" h="806917">
                 <a:moveTo>
                   <a:pt x="0" y="0"/>
                 </a:moveTo>
@@ -5279,19 +5276,19 @@
               </a:extLst>
             </a:blip>
             <a:stretch>
-              <a:fillRect l="0" t="0" r="0" b="0"/>
+              <a:fillRect/>
             </a:stretch>
           </a:blipFill>
         </p:spPr>
       </p:sp>
       <p:sp>
         <p:nvSpPr>
-          <p:cNvPr name="TextBox 5" id="5"/>
-          <p:cNvSpPr txBox="true"/>
+          <p:cNvPr id="5" name="TextBox 5"/>
+          <p:cNvSpPr txBox="1"/>
           <p:nvPr/>
         </p:nvSpPr>
         <p:spPr>
-          <a:xfrm rot="0">
+          <a:xfrm>
             <a:off x="1398897" y="6666711"/>
             <a:ext cx="3103664" cy="761227"/>
           </a:xfrm>
@@ -5300,12 +5297,12 @@
           </a:prstGeom>
         </p:spPr>
         <p:txBody>
-          <a:bodyPr anchor="t" rtlCol="false" tIns="0" lIns="0" bIns="0" rIns="0">
+          <a:bodyPr lIns="0" tIns="0" rIns="0" bIns="0" rtlCol="0" anchor="t">
             <a:spAutoFit/>
           </a:bodyPr>
           <a:lstStyle/>
           <a:p>
-            <a:pPr algn="l" marL="0" indent="0" lvl="0">
+            <a:pPr marL="0" lvl="0" indent="0" algn="l">
               <a:lnSpc>
                 <a:spcPts val="2027"/>
               </a:lnSpc>
@@ -5323,31 +5320,19 @@
                 <a:cs typeface="TT Hoves"/>
                 <a:sym typeface="TT Hoves"/>
               </a:rPr>
-              <a:t>Empl</a:t>
-            </a:r>
-            <a:r>
-              <a:rPr lang="en-US" sz="1621">
-                <a:solidFill>
-                  <a:srgbClr val="000000"/>
-                </a:solidFill>
-                <a:latin typeface="TT Hoves"/>
-                <a:ea typeface="TT Hoves"/>
-                <a:cs typeface="TT Hoves"/>
-                <a:sym typeface="TT Hoves"/>
-              </a:rPr>
-              <a:t>oyees begin complaining that part of the company's database has been deleted. </a:t>
-            </a:r>
-          </a:p>
-        </p:txBody>
-      </p:sp>
-      <p:sp>
-        <p:nvSpPr>
-          <p:cNvPr name="TextBox 6" id="6"/>
-          <p:cNvSpPr txBox="true"/>
+              <a:t>Employees begin complaining that part of the company's database has been deleted. </a:t>
+            </a:r>
+          </a:p>
+        </p:txBody>
+      </p:sp>
+      <p:sp>
+        <p:nvSpPr>
+          <p:cNvPr id="6" name="TextBox 6"/>
+          <p:cNvSpPr txBox="1"/>
           <p:nvPr/>
         </p:nvSpPr>
         <p:spPr>
-          <a:xfrm rot="0">
+          <a:xfrm>
             <a:off x="5956105" y="6666711"/>
             <a:ext cx="3187895" cy="2047102"/>
           </a:xfrm>
@@ -5356,12 +5341,12 @@
           </a:prstGeom>
         </p:spPr>
         <p:txBody>
-          <a:bodyPr anchor="t" rtlCol="false" tIns="0" lIns="0" bIns="0" rIns="0">
+          <a:bodyPr lIns="0" tIns="0" rIns="0" bIns="0" rtlCol="0" anchor="t">
             <a:spAutoFit/>
           </a:bodyPr>
           <a:lstStyle/>
           <a:p>
-            <a:pPr algn="l" marL="0" indent="0" lvl="0">
+            <a:pPr marL="0" lvl="0" indent="0" algn="l">
               <a:lnSpc>
                 <a:spcPts val="2027"/>
               </a:lnSpc>
@@ -5386,12 +5371,12 @@
       </p:sp>
       <p:sp>
         <p:nvSpPr>
-          <p:cNvPr name="TextBox 7" id="7"/>
-          <p:cNvSpPr txBox="true"/>
+          <p:cNvPr id="7" name="TextBox 7"/>
+          <p:cNvSpPr txBox="1"/>
           <p:nvPr/>
         </p:nvSpPr>
         <p:spPr>
-          <a:xfrm rot="0">
+          <a:xfrm>
             <a:off x="10328383" y="6666711"/>
             <a:ext cx="3156501" cy="1275577"/>
           </a:xfrm>
@@ -5400,12 +5385,12 @@
           </a:prstGeom>
         </p:spPr>
         <p:txBody>
-          <a:bodyPr anchor="t" rtlCol="false" tIns="0" lIns="0" bIns="0" rIns="0">
+          <a:bodyPr lIns="0" tIns="0" rIns="0" bIns="0" rtlCol="0" anchor="t">
             <a:spAutoFit/>
           </a:bodyPr>
           <a:lstStyle/>
           <a:p>
-            <a:pPr algn="l" marL="0" indent="0" lvl="0">
+            <a:pPr marL="0" lvl="0" indent="0" algn="l">
               <a:lnSpc>
                 <a:spcPts val="2027"/>
               </a:lnSpc>
@@ -5423,8 +5408,40 @@
                 <a:cs typeface="TT Hoves"/>
                 <a:sym typeface="TT Hoves"/>
               </a:rPr>
-              <a:t>T</a:t>
-            </a:r>
+              <a:t>The Systems Administrator then coordinates with the network team and assures them that everything is fine, as he backed up the database the previous day.</a:t>
+            </a:r>
+          </a:p>
+        </p:txBody>
+      </p:sp>
+      <p:sp>
+        <p:nvSpPr>
+          <p:cNvPr id="8" name="TextBox 8"/>
+          <p:cNvSpPr txBox="1"/>
+          <p:nvPr/>
+        </p:nvSpPr>
+        <p:spPr>
+          <a:xfrm>
+            <a:off x="14344010" y="6666711"/>
+            <a:ext cx="3161857" cy="1018402"/>
+          </a:xfrm>
+          <a:prstGeom prst="rect">
+            <a:avLst/>
+          </a:prstGeom>
+        </p:spPr>
+        <p:txBody>
+          <a:bodyPr lIns="0" tIns="0" rIns="0" bIns="0" rtlCol="0" anchor="t">
+            <a:spAutoFit/>
+          </a:bodyPr>
+          <a:lstStyle/>
+          <a:p>
+            <a:pPr marL="0" lvl="0" indent="0" algn="l">
+              <a:lnSpc>
+                <a:spcPts val="2027"/>
+              </a:lnSpc>
+              <a:spcBef>
+                <a:spcPct val="0"/>
+              </a:spcBef>
+            </a:pPr>
             <a:r>
               <a:rPr lang="en-US" sz="1621">
                 <a:solidFill>
@@ -5435,75 +5452,19 @@
                 <a:cs typeface="TT Hoves"/>
                 <a:sym typeface="TT Hoves"/>
               </a:rPr>
-              <a:t>he Systems Administrator then coordinates with the network team and assures them that everything is fine, as he backed up the database the previous day.</a:t>
-            </a:r>
-          </a:p>
-        </p:txBody>
-      </p:sp>
-      <p:sp>
-        <p:nvSpPr>
-          <p:cNvPr name="TextBox 8" id="8"/>
-          <p:cNvSpPr txBox="true"/>
-          <p:nvPr/>
-        </p:nvSpPr>
-        <p:spPr>
-          <a:xfrm rot="0">
-            <a:off x="14344010" y="6666711"/>
-            <a:ext cx="3161857" cy="1018402"/>
-          </a:xfrm>
-          <a:prstGeom prst="rect">
-            <a:avLst/>
-          </a:prstGeom>
-        </p:spPr>
-        <p:txBody>
-          <a:bodyPr anchor="t" rtlCol="false" tIns="0" lIns="0" bIns="0" rIns="0">
-            <a:spAutoFit/>
-          </a:bodyPr>
-          <a:lstStyle/>
-          <a:p>
-            <a:pPr algn="l" marL="0" indent="0" lvl="0">
-              <a:lnSpc>
-                <a:spcPts val="2027"/>
-              </a:lnSpc>
-              <a:spcBef>
-                <a:spcPct val="0"/>
-              </a:spcBef>
-            </a:pPr>
-            <a:r>
-              <a:rPr lang="en-US" sz="1621">
-                <a:solidFill>
-                  <a:srgbClr val="000000"/>
-                </a:solidFill>
-                <a:latin typeface="TT Hoves"/>
-                <a:ea typeface="TT Hoves"/>
-                <a:cs typeface="TT Hoves"/>
-                <a:sym typeface="TT Hoves"/>
-              </a:rPr>
-              <a:t>H</a:t>
-            </a:r>
-            <a:r>
-              <a:rPr lang="en-US" sz="1621">
-                <a:solidFill>
-                  <a:srgbClr val="000000"/>
-                </a:solidFill>
-                <a:latin typeface="TT Hoves"/>
-                <a:ea typeface="TT Hoves"/>
-                <a:cs typeface="TT Hoves"/>
-                <a:sym typeface="TT Hoves"/>
-              </a:rPr>
-              <a:t>e then documents the incident and updates the monitoring thresholds to detect similar problems earlier in the future.</a:t>
+              <a:t>He then documents the incident and updates the monitoring thresholds to detect similar problems earlier in the future.</a:t>
             </a:r>
           </a:p>
         </p:txBody>
       </p:sp>
       <p:grpSp>
         <p:nvGrpSpPr>
-          <p:cNvPr name="Group 9" id="9"/>
+          <p:cNvPr id="9" name="Group 9"/>
           <p:cNvGrpSpPr/>
           <p:nvPr/>
         </p:nvGrpSpPr>
         <p:grpSpPr>
-          <a:xfrm rot="0">
+          <a:xfrm>
             <a:off x="-951648" y="5516068"/>
             <a:ext cx="18348348" cy="730280"/>
             <a:chOff x="0" y="0"/>
@@ -5512,12 +5473,12 @@
         </p:grpSpPr>
         <p:sp>
           <p:nvSpPr>
-            <p:cNvPr name="Freeform 10" id="10"/>
+            <p:cNvPr id="10" name="Freeform 10"/>
             <p:cNvSpPr/>
             <p:nvPr/>
           </p:nvSpPr>
           <p:spPr>
-            <a:xfrm flipH="false" flipV="false" rot="0">
+            <a:xfrm>
               <a:off x="0" y="0"/>
               <a:ext cx="4832487" cy="192337"/>
             </a:xfrm>
@@ -5526,9 +5487,9 @@
               <a:gdLst/>
               <a:ahLst/>
               <a:cxnLst/>
-              <a:rect r="r" b="b" t="t" l="l"/>
+              <a:rect l="l" t="t" r="r" b="b"/>
               <a:pathLst>
-                <a:path h="192337" w="4832487">
+                <a:path w="4832487" h="192337">
                   <a:moveTo>
                     <a:pt x="42194" y="0"/>
                   </a:moveTo>
@@ -5595,8 +5556,8 @@
         </p:sp>
         <p:sp>
           <p:nvSpPr>
-            <p:cNvPr name="TextBox 11" id="11"/>
-            <p:cNvSpPr txBox="true"/>
+            <p:cNvPr id="11" name="TextBox 11"/>
+            <p:cNvSpPr txBox="1"/>
             <p:nvPr/>
           </p:nvSpPr>
           <p:spPr>
@@ -5609,46 +5570,47 @@
             </a:prstGeom>
           </p:spPr>
           <p:txBody>
-            <a:bodyPr anchor="ctr" rtlCol="false" tIns="50800" lIns="50800" bIns="50800" rIns="50800"/>
+            <a:bodyPr lIns="50800" tIns="50800" rIns="50800" bIns="50800" rtlCol="0" anchor="ctr"/>
             <a:lstStyle/>
             <a:p>
-              <a:pPr algn="ctr" marL="0" indent="0" lvl="0">
+              <a:pPr marL="0" lvl="0" indent="0" algn="ctr">
                 <a:lnSpc>
                   <a:spcPts val="2500"/>
                 </a:lnSpc>
               </a:pPr>
+              <a:endParaRPr/>
             </a:p>
           </p:txBody>
         </p:sp>
       </p:grpSp>
       <p:sp>
         <p:nvSpPr>
-          <p:cNvPr name="TextBox 12" id="12"/>
-          <p:cNvSpPr txBox="true"/>
+          <p:cNvPr id="12" name="TextBox 12"/>
+          <p:cNvSpPr txBox="1"/>
           <p:nvPr/>
         </p:nvSpPr>
         <p:spPr>
-          <a:xfrm rot="0">
+          <a:xfrm>
             <a:off x="1398897" y="5711346"/>
-            <a:ext cx="2199955" cy="339132"/>
+            <a:ext cx="2639703" cy="359073"/>
           </a:xfrm>
           <a:prstGeom prst="rect">
             <a:avLst/>
           </a:prstGeom>
         </p:spPr>
         <p:txBody>
-          <a:bodyPr anchor="t" rtlCol="false" tIns="0" lIns="0" bIns="0" rIns="0">
+          <a:bodyPr wrap="square" lIns="0" tIns="0" rIns="0" bIns="0" rtlCol="0" anchor="t">
             <a:spAutoFit/>
           </a:bodyPr>
           <a:lstStyle/>
           <a:p>
-            <a:pPr algn="l" marL="0" indent="0" lvl="0">
+            <a:pPr marL="0" lvl="0" indent="0" algn="l">
               <a:lnSpc>
                 <a:spcPts val="2767"/>
               </a:lnSpc>
             </a:pPr>
             <a:r>
-              <a:rPr lang="en-US" b="true" sz="2406">
+              <a:rPr lang="en-US" sz="2406" b="1" dirty="0">
                 <a:solidFill>
                   <a:srgbClr val="000000"/>
                 </a:solidFill>
@@ -5664,12 +5626,12 @@
       </p:sp>
       <p:sp>
         <p:nvSpPr>
-          <p:cNvPr name="TextBox 13" id="13"/>
-          <p:cNvSpPr txBox="true"/>
+          <p:cNvPr id="13" name="TextBox 13"/>
+          <p:cNvSpPr txBox="1"/>
           <p:nvPr/>
         </p:nvSpPr>
         <p:spPr>
-          <a:xfrm rot="0">
+          <a:xfrm>
             <a:off x="5956105" y="5711346"/>
             <a:ext cx="1724420" cy="339132"/>
           </a:xfrm>
@@ -5678,18 +5640,18 @@
           </a:prstGeom>
         </p:spPr>
         <p:txBody>
-          <a:bodyPr anchor="t" rtlCol="false" tIns="0" lIns="0" bIns="0" rIns="0">
+          <a:bodyPr lIns="0" tIns="0" rIns="0" bIns="0" rtlCol="0" anchor="t">
             <a:spAutoFit/>
           </a:bodyPr>
           <a:lstStyle/>
           <a:p>
-            <a:pPr algn="l" marL="0" indent="0" lvl="0">
+            <a:pPr marL="0" lvl="0" indent="0" algn="l">
               <a:lnSpc>
                 <a:spcPts val="2767"/>
               </a:lnSpc>
             </a:pPr>
             <a:r>
-              <a:rPr lang="en-US" b="true" sz="2406">
+              <a:rPr lang="en-US" sz="2406" b="1">
                 <a:solidFill>
                   <a:srgbClr val="000000"/>
                 </a:solidFill>
@@ -5705,12 +5667,12 @@
       </p:sp>
       <p:sp>
         <p:nvSpPr>
-          <p:cNvPr name="TextBox 14" id="14"/>
-          <p:cNvSpPr txBox="true"/>
+          <p:cNvPr id="14" name="TextBox 14"/>
+          <p:cNvSpPr txBox="1"/>
           <p:nvPr/>
         </p:nvSpPr>
         <p:spPr>
-          <a:xfrm rot="0">
+          <a:xfrm>
             <a:off x="10328383" y="5711346"/>
             <a:ext cx="2926467" cy="339132"/>
           </a:xfrm>
@@ -5719,18 +5681,18 @@
           </a:prstGeom>
         </p:spPr>
         <p:txBody>
-          <a:bodyPr anchor="t" rtlCol="false" tIns="0" lIns="0" bIns="0" rIns="0">
+          <a:bodyPr lIns="0" tIns="0" rIns="0" bIns="0" rtlCol="0" anchor="t">
             <a:spAutoFit/>
           </a:bodyPr>
           <a:lstStyle/>
           <a:p>
-            <a:pPr algn="l" marL="0" indent="0" lvl="0">
+            <a:pPr marL="0" lvl="0" indent="0" algn="l">
               <a:lnSpc>
                 <a:spcPts val="2767"/>
               </a:lnSpc>
             </a:pPr>
             <a:r>
-              <a:rPr lang="en-US" b="true" sz="2406">
+              <a:rPr lang="en-US" sz="2406" b="1">
                 <a:solidFill>
                   <a:srgbClr val="000000"/>
                 </a:solidFill>
@@ -5746,12 +5708,12 @@
       </p:sp>
       <p:sp>
         <p:nvSpPr>
-          <p:cNvPr name="TextBox 15" id="15"/>
-          <p:cNvSpPr txBox="true"/>
+          <p:cNvPr id="15" name="TextBox 15"/>
+          <p:cNvSpPr txBox="1"/>
           <p:nvPr/>
         </p:nvSpPr>
         <p:spPr>
-          <a:xfrm rot="0">
+          <a:xfrm>
             <a:off x="14344010" y="5711346"/>
             <a:ext cx="2926467" cy="339132"/>
           </a:xfrm>
@@ -5760,18 +5722,18 @@
           </a:prstGeom>
         </p:spPr>
         <p:txBody>
-          <a:bodyPr anchor="t" rtlCol="false" tIns="0" lIns="0" bIns="0" rIns="0">
+          <a:bodyPr lIns="0" tIns="0" rIns="0" bIns="0" rtlCol="0" anchor="t">
             <a:spAutoFit/>
           </a:bodyPr>
           <a:lstStyle/>
           <a:p>
-            <a:pPr algn="l" marL="0" indent="0" lvl="0">
+            <a:pPr marL="0" lvl="0" indent="0" algn="l">
               <a:lnSpc>
                 <a:spcPts val="2767"/>
               </a:lnSpc>
             </a:pPr>
             <a:r>
-              <a:rPr lang="en-US" b="true" sz="2406">
+              <a:rPr lang="en-US" sz="2406" b="1">
                 <a:solidFill>
                   <a:srgbClr val="000000"/>
                 </a:solidFill>
@@ -5787,12 +5749,12 @@
       </p:sp>
       <p:sp>
         <p:nvSpPr>
-          <p:cNvPr name="Freeform 16" id="16"/>
+          <p:cNvPr id="16" name="Freeform 16"/>
           <p:cNvSpPr/>
           <p:nvPr/>
         </p:nvSpPr>
         <p:spPr>
-          <a:xfrm flipH="false" flipV="false" rot="0">
+          <a:xfrm>
             <a:off x="13341779" y="3704370"/>
             <a:ext cx="3503898" cy="471434"/>
           </a:xfrm>
@@ -5801,9 +5763,9 @@
             <a:gdLst/>
             <a:ahLst/>
             <a:cxnLst/>
-            <a:rect r="r" b="b" t="t" l="l"/>
+            <a:rect l="l" t="t" r="r" b="b"/>
             <a:pathLst>
-              <a:path h="471434" w="3503898">
+              <a:path w="3503898" h="471434">
                 <a:moveTo>
                   <a:pt x="0" y="0"/>
                 </a:moveTo>
@@ -5832,7 +5794,7 @@
               </a:extLst>
             </a:blip>
             <a:stretch>
-              <a:fillRect l="0" t="0" r="0" b="0"/>
+              <a:fillRect/>
             </a:stretch>
           </a:blipFill>
         </p:spPr>
@@ -5846,7 +5808,7 @@
 </file>
 
 <file path=ppt/slides/slide6.xml><?xml version="1.0" encoding="utf-8"?>
-<p:sld xmlns:p="http://schemas.openxmlformats.org/presentationml/2006/main" xmlns:a="http://schemas.openxmlformats.org/drawingml/2006/main" xmlns:r="http://schemas.openxmlformats.org/officeDocument/2006/relationships">
+<p:sld xmlns:a="http://schemas.openxmlformats.org/drawingml/2006/main" xmlns:r="http://schemas.openxmlformats.org/officeDocument/2006/relationships" xmlns:p="http://schemas.openxmlformats.org/presentationml/2006/main">
   <p:cSld>
     <p:spTree>
       <p:nvGrpSpPr>
@@ -5864,12 +5826,12 @@
       </p:grpSpPr>
       <p:sp>
         <p:nvSpPr>
-          <p:cNvPr name="Freeform 2" id="2"/>
+          <p:cNvPr id="2" name="Freeform 2"/>
           <p:cNvSpPr/>
           <p:nvPr/>
         </p:nvSpPr>
         <p:spPr>
-          <a:xfrm flipH="false" flipV="false" rot="0">
+          <a:xfrm>
             <a:off x="16653114" y="640862"/>
             <a:ext cx="852752" cy="806917"/>
           </a:xfrm>
@@ -5878,9 +5840,9 @@
             <a:gdLst/>
             <a:ahLst/>
             <a:cxnLst/>
-            <a:rect r="r" b="b" t="t" l="l"/>
+            <a:rect l="l" t="t" r="r" b="b"/>
             <a:pathLst>
-              <a:path h="806917" w="852752">
+              <a:path w="852752" h="806917">
                 <a:moveTo>
                   <a:pt x="0" y="0"/>
                 </a:moveTo>
@@ -5909,19 +5871,19 @@
               </a:extLst>
             </a:blip>
             <a:stretch>
-              <a:fillRect l="0" t="0" r="0" b="0"/>
+              <a:fillRect/>
             </a:stretch>
           </a:blipFill>
         </p:spPr>
       </p:sp>
       <p:grpSp>
         <p:nvGrpSpPr>
-          <p:cNvPr name="Group 3" id="3"/>
+          <p:cNvPr id="3" name="Group 3"/>
           <p:cNvGrpSpPr/>
           <p:nvPr/>
         </p:nvGrpSpPr>
         <p:grpSpPr>
-          <a:xfrm rot="0">
+          <a:xfrm>
             <a:off x="-666012" y="8803790"/>
             <a:ext cx="13451137" cy="1483210"/>
             <a:chOff x="0" y="0"/>
@@ -5930,12 +5892,12 @@
         </p:grpSpPr>
         <p:sp>
           <p:nvSpPr>
-            <p:cNvPr name="Freeform 4" id="4"/>
+            <p:cNvPr id="4" name="Freeform 4"/>
             <p:cNvSpPr/>
             <p:nvPr/>
           </p:nvSpPr>
           <p:spPr>
-            <a:xfrm flipH="false" flipV="false" rot="0">
+            <a:xfrm>
               <a:off x="0" y="0"/>
               <a:ext cx="3542686" cy="390640"/>
             </a:xfrm>
@@ -5944,9 +5906,9 @@
               <a:gdLst/>
               <a:ahLst/>
               <a:cxnLst/>
-              <a:rect r="r" b="b" t="t" l="l"/>
+              <a:rect l="l" t="t" r="r" b="b"/>
               <a:pathLst>
-                <a:path h="390640" w="3542686">
+                <a:path w="3542686" h="390640">
                   <a:moveTo>
                     <a:pt x="57556" y="0"/>
                   </a:moveTo>
@@ -5993,8 +5955,8 @@
         </p:sp>
         <p:sp>
           <p:nvSpPr>
-            <p:cNvPr name="TextBox 5" id="5"/>
-            <p:cNvSpPr txBox="true"/>
+            <p:cNvPr id="5" name="TextBox 5"/>
+            <p:cNvSpPr txBox="1"/>
             <p:nvPr/>
           </p:nvSpPr>
           <p:spPr>
@@ -6007,26 +5969,27 @@
             </a:prstGeom>
           </p:spPr>
           <p:txBody>
-            <a:bodyPr anchor="ctr" rtlCol="false" tIns="50800" lIns="50800" bIns="50800" rIns="50800"/>
+            <a:bodyPr lIns="50800" tIns="50800" rIns="50800" bIns="50800" rtlCol="0" anchor="ctr"/>
             <a:lstStyle/>
             <a:p>
-              <a:pPr algn="ctr" marL="0" indent="0" lvl="0">
+              <a:pPr marL="0" lvl="0" indent="0" algn="ctr">
                 <a:lnSpc>
                   <a:spcPts val="2500"/>
                 </a:lnSpc>
               </a:pPr>
+              <a:endParaRPr/>
             </a:p>
           </p:txBody>
         </p:sp>
       </p:grpSp>
       <p:grpSp>
         <p:nvGrpSpPr>
-          <p:cNvPr name="Group 6" id="6"/>
+          <p:cNvPr id="6" name="Group 6"/>
           <p:cNvGrpSpPr/>
           <p:nvPr/>
         </p:nvGrpSpPr>
         <p:grpSpPr>
-          <a:xfrm rot="0">
+          <a:xfrm>
             <a:off x="13006463" y="3019842"/>
             <a:ext cx="1833265" cy="1833265"/>
             <a:chOff x="0" y="0"/>
@@ -6035,12 +5998,12 @@
         </p:grpSpPr>
         <p:sp>
           <p:nvSpPr>
-            <p:cNvPr name="Freeform 7" id="7"/>
+            <p:cNvPr id="7" name="Freeform 7"/>
             <p:cNvSpPr/>
             <p:nvPr/>
           </p:nvSpPr>
           <p:spPr>
-            <a:xfrm flipH="false" flipV="false" rot="0">
+            <a:xfrm>
               <a:off x="0" y="0"/>
               <a:ext cx="560044" cy="560044"/>
             </a:xfrm>
@@ -6049,9 +6012,9 @@
               <a:gdLst/>
               <a:ahLst/>
               <a:cxnLst/>
-              <a:rect r="r" b="b" t="t" l="l"/>
+              <a:rect l="l" t="t" r="r" b="b"/>
               <a:pathLst>
-                <a:path h="560044" w="560044">
+                <a:path w="560044" h="560044">
                   <a:moveTo>
                     <a:pt x="0" y="0"/>
                   </a:moveTo>
@@ -6075,8 +6038,8 @@
         </p:sp>
         <p:sp>
           <p:nvSpPr>
-            <p:cNvPr name="TextBox 8" id="8"/>
-            <p:cNvSpPr txBox="true"/>
+            <p:cNvPr id="8" name="TextBox 8"/>
+            <p:cNvSpPr txBox="1"/>
             <p:nvPr/>
           </p:nvSpPr>
           <p:spPr>
@@ -6089,26 +6052,27 @@
             </a:prstGeom>
           </p:spPr>
           <p:txBody>
-            <a:bodyPr anchor="ctr" rtlCol="false" tIns="50800" lIns="50800" bIns="50800" rIns="50800"/>
+            <a:bodyPr lIns="50800" tIns="50800" rIns="50800" bIns="50800" rtlCol="0" anchor="ctr"/>
             <a:lstStyle/>
             <a:p>
-              <a:pPr algn="ctr" marL="0" indent="0" lvl="0">
+              <a:pPr marL="0" lvl="0" indent="0" algn="ctr">
                 <a:lnSpc>
                   <a:spcPts val="2500"/>
                 </a:lnSpc>
               </a:pPr>
+              <a:endParaRPr/>
             </a:p>
           </p:txBody>
         </p:sp>
       </p:grpSp>
       <p:grpSp>
         <p:nvGrpSpPr>
-          <p:cNvPr name="Group 9" id="9"/>
+          <p:cNvPr id="9" name="Group 9"/>
           <p:cNvGrpSpPr/>
           <p:nvPr/>
         </p:nvGrpSpPr>
         <p:grpSpPr>
-          <a:xfrm rot="0">
+          <a:xfrm>
             <a:off x="7821594" y="3019842"/>
             <a:ext cx="1833265" cy="1833265"/>
             <a:chOff x="0" y="0"/>
@@ -6117,12 +6081,12 @@
         </p:grpSpPr>
         <p:sp>
           <p:nvSpPr>
-            <p:cNvPr name="Freeform 10" id="10"/>
+            <p:cNvPr id="10" name="Freeform 10"/>
             <p:cNvSpPr/>
             <p:nvPr/>
           </p:nvSpPr>
           <p:spPr>
-            <a:xfrm flipH="false" flipV="false" rot="0">
+            <a:xfrm>
               <a:off x="0" y="0"/>
               <a:ext cx="560044" cy="560044"/>
             </a:xfrm>
@@ -6131,9 +6095,9 @@
               <a:gdLst/>
               <a:ahLst/>
               <a:cxnLst/>
-              <a:rect r="r" b="b" t="t" l="l"/>
+              <a:rect l="l" t="t" r="r" b="b"/>
               <a:pathLst>
-                <a:path h="560044" w="560044">
+                <a:path w="560044" h="560044">
                   <a:moveTo>
                     <a:pt x="0" y="0"/>
                   </a:moveTo>
@@ -6157,8 +6121,8 @@
         </p:sp>
         <p:sp>
           <p:nvSpPr>
-            <p:cNvPr name="TextBox 11" id="11"/>
-            <p:cNvSpPr txBox="true"/>
+            <p:cNvPr id="11" name="TextBox 11"/>
+            <p:cNvSpPr txBox="1"/>
             <p:nvPr/>
           </p:nvSpPr>
           <p:spPr>
@@ -6171,26 +6135,27 @@
             </a:prstGeom>
           </p:spPr>
           <p:txBody>
-            <a:bodyPr anchor="ctr" rtlCol="false" tIns="50800" lIns="50800" bIns="50800" rIns="50800"/>
+            <a:bodyPr lIns="50800" tIns="50800" rIns="50800" bIns="50800" rtlCol="0" anchor="ctr"/>
             <a:lstStyle/>
             <a:p>
-              <a:pPr algn="ctr" marL="0" indent="0" lvl="0">
+              <a:pPr marL="0" lvl="0" indent="0" algn="ctr">
                 <a:lnSpc>
                   <a:spcPts val="2500"/>
                 </a:lnSpc>
               </a:pPr>
+              <a:endParaRPr/>
             </a:p>
           </p:txBody>
         </p:sp>
       </p:grpSp>
       <p:sp>
         <p:nvSpPr>
-          <p:cNvPr name="Freeform 12" id="12"/>
+          <p:cNvPr id="12" name="Freeform 12"/>
           <p:cNvSpPr/>
           <p:nvPr/>
         </p:nvSpPr>
         <p:spPr>
-          <a:xfrm flipH="false" flipV="false" rot="0">
+          <a:xfrm>
             <a:off x="13440975" y="3273253"/>
             <a:ext cx="867803" cy="1166233"/>
           </a:xfrm>
@@ -6199,9 +6164,9 @@
             <a:gdLst/>
             <a:ahLst/>
             <a:cxnLst/>
-            <a:rect r="r" b="b" t="t" l="l"/>
+            <a:rect l="l" t="t" r="r" b="b"/>
             <a:pathLst>
-              <a:path h="1166233" w="867803">
+              <a:path w="867803" h="1166233">
                 <a:moveTo>
                   <a:pt x="0" y="0"/>
                 </a:moveTo>
@@ -6224,19 +6189,19 @@
           <a:blipFill>
             <a:blip r:embed="rId4"/>
             <a:stretch>
-              <a:fillRect l="0" t="0" r="0" b="0"/>
+              <a:fillRect/>
             </a:stretch>
           </a:blipFill>
         </p:spPr>
       </p:sp>
       <p:sp>
         <p:nvSpPr>
-          <p:cNvPr name="Freeform 13" id="13"/>
+          <p:cNvPr id="13" name="Freeform 13"/>
           <p:cNvSpPr/>
           <p:nvPr/>
         </p:nvSpPr>
         <p:spPr>
-          <a:xfrm flipH="false" flipV="false" rot="0">
+          <a:xfrm>
             <a:off x="8266012" y="3516231"/>
             <a:ext cx="893130" cy="704541"/>
           </a:xfrm>
@@ -6245,9 +6210,9 @@
             <a:gdLst/>
             <a:ahLst/>
             <a:cxnLst/>
-            <a:rect r="r" b="b" t="t" l="l"/>
+            <a:rect l="l" t="t" r="r" b="b"/>
             <a:pathLst>
-              <a:path h="704541" w="893130">
+              <a:path w="893130" h="704541">
                 <a:moveTo>
                   <a:pt x="0" y="0"/>
                 </a:moveTo>
@@ -6270,19 +6235,19 @@
           <a:blipFill>
             <a:blip r:embed="rId5"/>
             <a:stretch>
-              <a:fillRect l="0" t="0" r="0" b="0"/>
+              <a:fillRect/>
             </a:stretch>
           </a:blipFill>
         </p:spPr>
       </p:sp>
       <p:sp>
         <p:nvSpPr>
-          <p:cNvPr name="Freeform 14" id="14"/>
+          <p:cNvPr id="14" name="Freeform 14"/>
           <p:cNvSpPr/>
           <p:nvPr/>
         </p:nvSpPr>
         <p:spPr>
-          <a:xfrm flipH="false" flipV="false" rot="0">
+          <a:xfrm>
             <a:off x="13755402" y="9022583"/>
             <a:ext cx="3503898" cy="471434"/>
           </a:xfrm>
@@ -6291,9 +6256,9 @@
             <a:gdLst/>
             <a:ahLst/>
             <a:cxnLst/>
-            <a:rect r="r" b="b" t="t" l="l"/>
+            <a:rect l="l" t="t" r="r" b="b"/>
             <a:pathLst>
-              <a:path h="471434" w="3503898">
+              <a:path w="3503898" h="471434">
                 <a:moveTo>
                   <a:pt x="0" y="0"/>
                 </a:moveTo>
@@ -6322,19 +6287,19 @@
               </a:extLst>
             </a:blip>
             <a:stretch>
-              <a:fillRect l="0" t="0" r="0" b="0"/>
+              <a:fillRect/>
             </a:stretch>
           </a:blipFill>
         </p:spPr>
       </p:sp>
       <p:sp>
         <p:nvSpPr>
-          <p:cNvPr name="TextBox 15" id="15"/>
-          <p:cNvSpPr txBox="true"/>
+          <p:cNvPr id="15" name="TextBox 15"/>
+          <p:cNvSpPr txBox="1"/>
           <p:nvPr/>
         </p:nvSpPr>
         <p:spPr>
-          <a:xfrm rot="0">
+          <a:xfrm>
             <a:off x="1440755" y="2167719"/>
             <a:ext cx="5690339" cy="1095375"/>
           </a:xfrm>
@@ -6343,18 +6308,18 @@
           </a:prstGeom>
         </p:spPr>
         <p:txBody>
-          <a:bodyPr anchor="t" rtlCol="false" tIns="0" lIns="0" bIns="0" rIns="0">
+          <a:bodyPr lIns="0" tIns="0" rIns="0" bIns="0" rtlCol="0" anchor="t">
             <a:spAutoFit/>
           </a:bodyPr>
           <a:lstStyle/>
           <a:p>
-            <a:pPr algn="l" marL="0" indent="0" lvl="0">
+            <a:pPr marL="0" lvl="0" indent="0" algn="l">
               <a:lnSpc>
                 <a:spcPts val="8625"/>
               </a:lnSpc>
             </a:pPr>
             <a:r>
-              <a:rPr lang="en-US" b="true" sz="7500">
+              <a:rPr lang="en-US" sz="7500" b="1">
                 <a:solidFill>
                   <a:srgbClr val="000000"/>
                 </a:solidFill>
@@ -6370,12 +6335,12 @@
       </p:sp>
       <p:sp>
         <p:nvSpPr>
-          <p:cNvPr name="TextBox 16" id="16"/>
-          <p:cNvSpPr txBox="true"/>
+          <p:cNvPr id="16" name="TextBox 16"/>
+          <p:cNvSpPr txBox="1"/>
           <p:nvPr/>
         </p:nvSpPr>
         <p:spPr>
-          <a:xfrm rot="0">
+          <a:xfrm>
             <a:off x="1028700" y="711200"/>
             <a:ext cx="1510928" cy="625484"/>
           </a:xfrm>
@@ -6384,12 +6349,12 @@
           </a:prstGeom>
         </p:spPr>
         <p:txBody>
-          <a:bodyPr anchor="t" rtlCol="false" tIns="0" lIns="0" bIns="0" rIns="0">
+          <a:bodyPr lIns="0" tIns="0" rIns="0" bIns="0" rtlCol="0" anchor="t">
             <a:spAutoFit/>
           </a:bodyPr>
           <a:lstStyle/>
           <a:p>
-            <a:pPr algn="l" marL="0" indent="0" lvl="0">
+            <a:pPr marL="0" lvl="0" indent="0" algn="l">
               <a:lnSpc>
                 <a:spcPts val="2498"/>
               </a:lnSpc>
@@ -6408,7 +6373,7 @@
             </a:r>
           </a:p>
           <a:p>
-            <a:pPr algn="l" marL="0" indent="0" lvl="0">
+            <a:pPr marL="0" lvl="0" indent="0" algn="l">
               <a:lnSpc>
                 <a:spcPts val="2498"/>
               </a:lnSpc>
@@ -6430,12 +6395,12 @@
       </p:sp>
       <p:sp>
         <p:nvSpPr>
-          <p:cNvPr name="TextBox 17" id="17"/>
-          <p:cNvSpPr txBox="true"/>
+          <p:cNvPr id="17" name="TextBox 17"/>
+          <p:cNvSpPr txBox="1"/>
           <p:nvPr/>
         </p:nvSpPr>
         <p:spPr>
-          <a:xfrm rot="0">
+          <a:xfrm>
             <a:off x="7821594" y="5385934"/>
             <a:ext cx="3956792" cy="368289"/>
           </a:xfrm>
@@ -6444,18 +6409,18 @@
           </a:prstGeom>
         </p:spPr>
         <p:txBody>
-          <a:bodyPr anchor="t" rtlCol="false" tIns="0" lIns="0" bIns="0" rIns="0">
+          <a:bodyPr lIns="0" tIns="0" rIns="0" bIns="0" rtlCol="0" anchor="t">
             <a:spAutoFit/>
           </a:bodyPr>
           <a:lstStyle/>
           <a:p>
-            <a:pPr algn="l" marL="0" indent="0" lvl="0">
+            <a:pPr marL="0" lvl="0" indent="0" algn="l">
               <a:lnSpc>
                 <a:spcPts val="2872"/>
               </a:lnSpc>
             </a:pPr>
             <a:r>
-              <a:rPr lang="en-US" b="true" sz="2498">
+              <a:rPr lang="en-US" sz="2498" b="1">
                 <a:solidFill>
                   <a:srgbClr val="000000"/>
                 </a:solidFill>
@@ -6471,12 +6436,12 @@
       </p:sp>
       <p:sp>
         <p:nvSpPr>
-          <p:cNvPr name="TextBox 18" id="18"/>
-          <p:cNvSpPr txBox="true"/>
+          <p:cNvPr id="18" name="TextBox 18"/>
+          <p:cNvSpPr txBox="1"/>
           <p:nvPr/>
         </p:nvSpPr>
         <p:spPr>
-          <a:xfrm rot="0">
+          <a:xfrm>
             <a:off x="13006463" y="5385934"/>
             <a:ext cx="3956792" cy="368289"/>
           </a:xfrm>
@@ -6485,18 +6450,18 @@
           </a:prstGeom>
         </p:spPr>
         <p:txBody>
-          <a:bodyPr anchor="t" rtlCol="false" tIns="0" lIns="0" bIns="0" rIns="0">
+          <a:bodyPr lIns="0" tIns="0" rIns="0" bIns="0" rtlCol="0" anchor="t">
             <a:spAutoFit/>
           </a:bodyPr>
           <a:lstStyle/>
           <a:p>
-            <a:pPr algn="l" marL="0" indent="0" lvl="0">
+            <a:pPr marL="0" lvl="0" indent="0" algn="l">
               <a:lnSpc>
                 <a:spcPts val="2872"/>
               </a:lnSpc>
             </a:pPr>
             <a:r>
-              <a:rPr lang="en-US" b="true" sz="2498">
+              <a:rPr lang="en-US" sz="2498" b="1">
                 <a:solidFill>
                   <a:srgbClr val="000000"/>
                 </a:solidFill>
@@ -6512,12 +6477,12 @@
       </p:sp>
       <p:sp>
         <p:nvSpPr>
-          <p:cNvPr name="TextBox 19" id="19"/>
-          <p:cNvSpPr txBox="true"/>
+          <p:cNvPr id="19" name="TextBox 19"/>
+          <p:cNvSpPr txBox="1"/>
           <p:nvPr/>
         </p:nvSpPr>
         <p:spPr>
-          <a:xfrm rot="0">
+          <a:xfrm>
             <a:off x="7821594" y="5996872"/>
             <a:ext cx="4318710" cy="1882784"/>
           </a:xfrm>
@@ -6526,12 +6491,12 @@
           </a:prstGeom>
         </p:spPr>
         <p:txBody>
-          <a:bodyPr anchor="t" rtlCol="false" tIns="0" lIns="0" bIns="0" rIns="0">
+          <a:bodyPr lIns="0" tIns="0" rIns="0" bIns="0" rtlCol="0" anchor="t">
             <a:spAutoFit/>
           </a:bodyPr>
           <a:lstStyle/>
           <a:p>
-            <a:pPr algn="l" marL="0" indent="0" lvl="0">
+            <a:pPr marL="0" lvl="0" indent="0" algn="l">
               <a:lnSpc>
                 <a:spcPts val="2498"/>
               </a:lnSpc>
@@ -6556,12 +6521,12 @@
       </p:sp>
       <p:sp>
         <p:nvSpPr>
-          <p:cNvPr name="TextBox 20" id="20"/>
-          <p:cNvSpPr txBox="true"/>
+          <p:cNvPr id="20" name="TextBox 20"/>
+          <p:cNvSpPr txBox="1"/>
           <p:nvPr/>
         </p:nvSpPr>
         <p:spPr>
-          <a:xfrm rot="0">
+          <a:xfrm>
             <a:off x="13006463" y="5992359"/>
             <a:ext cx="4252837" cy="1882784"/>
           </a:xfrm>
@@ -6570,12 +6535,12 @@
           </a:prstGeom>
         </p:spPr>
         <p:txBody>
-          <a:bodyPr anchor="t" rtlCol="false" tIns="0" lIns="0" bIns="0" rIns="0">
+          <a:bodyPr lIns="0" tIns="0" rIns="0" bIns="0" rtlCol="0" anchor="t">
             <a:spAutoFit/>
           </a:bodyPr>
           <a:lstStyle/>
           <a:p>
-            <a:pPr algn="l" marL="0" indent="0" lvl="0">
+            <a:pPr marL="0" lvl="0" indent="0" algn="l">
               <a:lnSpc>
                 <a:spcPts val="2498"/>
               </a:lnSpc>
@@ -6607,13 +6572,14 @@
 </file>
 
 <file path=ppt/slides/slide7.xml><?xml version="1.0" encoding="utf-8"?>
-<p:sld xmlns:p="http://schemas.openxmlformats.org/presentationml/2006/main" xmlns:a="http://schemas.openxmlformats.org/drawingml/2006/main" xmlns:r="http://schemas.openxmlformats.org/officeDocument/2006/relationships">
+<p:sld xmlns:a="http://schemas.openxmlformats.org/drawingml/2006/main" xmlns:r="http://schemas.openxmlformats.org/officeDocument/2006/relationships" xmlns:p="http://schemas.openxmlformats.org/presentationml/2006/main">
   <p:cSld>
     <p:bg>
       <p:bgPr>
         <a:solidFill>
           <a:srgbClr val="92B8DD"/>
         </a:solidFill>
+        <a:effectLst/>
       </p:bgPr>
     </p:bg>
     <p:spTree>
@@ -6632,12 +6598,12 @@
       </p:grpSpPr>
       <p:grpSp>
         <p:nvGrpSpPr>
-          <p:cNvPr name="Group 2" id="2"/>
+          <p:cNvPr id="2" name="Group 2"/>
           <p:cNvGrpSpPr/>
           <p:nvPr/>
         </p:nvGrpSpPr>
         <p:grpSpPr>
-          <a:xfrm rot="0">
+          <a:xfrm>
             <a:off x="0" y="-153702"/>
             <a:ext cx="16072434" cy="8520557"/>
             <a:chOff x="0" y="0"/>
@@ -6646,12 +6612,12 @@
         </p:grpSpPr>
         <p:sp>
           <p:nvSpPr>
-            <p:cNvPr name="Freeform 3" id="3"/>
+            <p:cNvPr id="3" name="Freeform 3"/>
             <p:cNvSpPr/>
             <p:nvPr/>
           </p:nvSpPr>
           <p:spPr>
-            <a:xfrm flipH="false" flipV="false" rot="0">
+            <a:xfrm>
               <a:off x="0" y="0"/>
               <a:ext cx="4233069" cy="2244097"/>
             </a:xfrm>
@@ -6660,9 +6626,9 @@
               <a:gdLst/>
               <a:ahLst/>
               <a:cxnLst/>
-              <a:rect r="r" b="b" t="t" l="l"/>
+              <a:rect l="l" t="t" r="r" b="b"/>
               <a:pathLst>
-                <a:path h="2244097" w="4233069">
+                <a:path w="4233069" h="2244097">
                   <a:moveTo>
                     <a:pt x="0" y="0"/>
                   </a:moveTo>
@@ -6686,8 +6652,8 @@
         </p:sp>
         <p:sp>
           <p:nvSpPr>
-            <p:cNvPr name="TextBox 4" id="4"/>
-            <p:cNvSpPr txBox="true"/>
+            <p:cNvPr id="4" name="TextBox 4"/>
+            <p:cNvSpPr txBox="1"/>
             <p:nvPr/>
           </p:nvSpPr>
           <p:spPr>
@@ -6700,10 +6666,10 @@
             </a:prstGeom>
           </p:spPr>
           <p:txBody>
-            <a:bodyPr anchor="ctr" rtlCol="false" tIns="50800" lIns="50800" bIns="50800" rIns="50800"/>
+            <a:bodyPr lIns="50800" tIns="50800" rIns="50800" bIns="50800" rtlCol="0" anchor="ctr"/>
             <a:lstStyle/>
             <a:p>
-              <a:pPr algn="ctr" marL="0" indent="0" lvl="0">
+              <a:pPr marL="0" lvl="0" indent="0" algn="ctr">
                 <a:lnSpc>
                   <a:spcPts val="2659"/>
                 </a:lnSpc>
@@ -6711,18 +6677,19 @@
                   <a:spcPct val="0"/>
                 </a:spcBef>
               </a:pPr>
+              <a:endParaRPr/>
             </a:p>
           </p:txBody>
         </p:sp>
       </p:grpSp>
       <p:sp>
         <p:nvSpPr>
-          <p:cNvPr name="Freeform 5" id="5"/>
+          <p:cNvPr id="5" name="Freeform 5"/>
           <p:cNvSpPr/>
           <p:nvPr/>
         </p:nvSpPr>
         <p:spPr>
-          <a:xfrm flipH="false" flipV="false" rot="0">
+          <a:xfrm>
             <a:off x="16653114" y="640862"/>
             <a:ext cx="852752" cy="806917"/>
           </a:xfrm>
@@ -6731,9 +6698,9 @@
             <a:gdLst/>
             <a:ahLst/>
             <a:cxnLst/>
-            <a:rect r="r" b="b" t="t" l="l"/>
+            <a:rect l="l" t="t" r="r" b="b"/>
             <a:pathLst>
-              <a:path h="806917" w="852752">
+              <a:path w="852752" h="806917">
                 <a:moveTo>
                   <a:pt x="0" y="0"/>
                 </a:moveTo>
@@ -6762,19 +6729,19 @@
               </a:extLst>
             </a:blip>
             <a:stretch>
-              <a:fillRect l="0" t="0" r="0" b="0"/>
+              <a:fillRect/>
             </a:stretch>
           </a:blipFill>
         </p:spPr>
       </p:sp>
       <p:sp>
         <p:nvSpPr>
-          <p:cNvPr name="TextBox 6" id="6"/>
-          <p:cNvSpPr txBox="true"/>
+          <p:cNvPr id="6" name="TextBox 6"/>
+          <p:cNvSpPr txBox="1"/>
           <p:nvPr/>
         </p:nvSpPr>
         <p:spPr>
-          <a:xfrm rot="0">
+          <a:xfrm>
             <a:off x="14406931" y="9097010"/>
             <a:ext cx="2852369" cy="403098"/>
           </a:xfrm>
@@ -6783,12 +6750,12 @@
           </a:prstGeom>
         </p:spPr>
         <p:txBody>
-          <a:bodyPr anchor="t" rtlCol="false" tIns="0" lIns="0" bIns="0" rIns="0">
+          <a:bodyPr lIns="0" tIns="0" rIns="0" bIns="0" rtlCol="0" anchor="t">
             <a:spAutoFit/>
           </a:bodyPr>
           <a:lstStyle/>
           <a:p>
-            <a:pPr algn="r" marL="0" indent="0" lvl="0">
+            <a:pPr marL="0" lvl="0" indent="0" algn="r">
               <a:lnSpc>
                 <a:spcPts val="1716"/>
               </a:lnSpc>
@@ -6810,7 +6777,7 @@
       </p:sp>
       <p:sp>
         <p:nvSpPr>
-          <p:cNvPr name="AutoShape 7" id="7"/>
+          <p:cNvPr id="7" name="AutoShape 7"/>
           <p:cNvSpPr/>
           <p:nvPr/>
         </p:nvSpPr>
@@ -6822,48 +6789,48 @@
           <a:prstGeom prst="line">
             <a:avLst/>
           </a:prstGeom>
-          <a:ln cap="flat" w="9525">
+          <a:ln w="9525" cap="flat">
             <a:solidFill>
               <a:srgbClr val="000000"/>
             </a:solidFill>
             <a:prstDash val="solid"/>
-            <a:headEnd type="none" len="sm" w="sm"/>
-            <a:tailEnd type="none" len="sm" w="sm"/>
+            <a:headEnd type="none" w="sm" len="sm"/>
+            <a:tailEnd type="none" w="sm" len="sm"/>
           </a:ln>
         </p:spPr>
       </p:sp>
       <p:sp>
         <p:nvSpPr>
-          <p:cNvPr name="AutoShape 8" id="8"/>
+          <p:cNvPr id="8" name="AutoShape 8"/>
           <p:cNvSpPr/>
           <p:nvPr/>
         </p:nvSpPr>
         <p:spPr>
-          <a:xfrm flipH="true">
+          <a:xfrm flipH="1">
             <a:off x="3522469" y="7115310"/>
             <a:ext cx="211976" cy="367153"/>
           </a:xfrm>
           <a:prstGeom prst="line">
             <a:avLst/>
           </a:prstGeom>
-          <a:ln cap="flat" w="9525">
+          <a:ln w="9525" cap="flat">
             <a:solidFill>
               <a:srgbClr val="000000"/>
             </a:solidFill>
             <a:prstDash val="solid"/>
-            <a:headEnd type="none" len="sm" w="sm"/>
-            <a:tailEnd type="none" len="sm" w="sm"/>
+            <a:headEnd type="none" w="sm" len="sm"/>
+            <a:tailEnd type="none" w="sm" len="sm"/>
           </a:ln>
         </p:spPr>
       </p:sp>
       <p:sp>
         <p:nvSpPr>
-          <p:cNvPr name="Freeform 9" id="9"/>
+          <p:cNvPr id="9" name="Freeform 9"/>
           <p:cNvSpPr/>
           <p:nvPr/>
         </p:nvSpPr>
         <p:spPr>
-          <a:xfrm flipH="false" flipV="false" rot="5400000">
+          <a:xfrm rot="5400000">
             <a:off x="15677421" y="2307892"/>
             <a:ext cx="3228076" cy="3060818"/>
           </a:xfrm>
@@ -6872,9 +6839,9 @@
             <a:gdLst/>
             <a:ahLst/>
             <a:cxnLst/>
-            <a:rect r="r" b="b" t="t" l="l"/>
+            <a:rect l="l" t="t" r="r" b="b"/>
             <a:pathLst>
-              <a:path h="3060818" w="3228076">
+              <a:path w="3228076" h="3060818">
                 <a:moveTo>
                   <a:pt x="0" y="0"/>
                 </a:moveTo>
@@ -6897,19 +6864,19 @@
           <a:blipFill>
             <a:blip r:embed="rId4"/>
             <a:stretch>
-              <a:fillRect l="0" t="0" r="0" b="0"/>
+              <a:fillRect/>
             </a:stretch>
           </a:blipFill>
         </p:spPr>
       </p:sp>
       <p:sp>
         <p:nvSpPr>
-          <p:cNvPr name="TextBox 10" id="10"/>
-          <p:cNvSpPr txBox="true"/>
+          <p:cNvPr id="10" name="TextBox 10"/>
+          <p:cNvSpPr txBox="1"/>
           <p:nvPr/>
         </p:nvSpPr>
         <p:spPr>
-          <a:xfrm rot="0">
+          <a:xfrm>
             <a:off x="1028700" y="740791"/>
             <a:ext cx="1510928" cy="373380"/>
           </a:xfrm>
@@ -6918,12 +6885,12 @@
           </a:prstGeom>
         </p:spPr>
         <p:txBody>
-          <a:bodyPr anchor="t" rtlCol="false" tIns="0" lIns="0" bIns="0" rIns="0">
+          <a:bodyPr lIns="0" tIns="0" rIns="0" bIns="0" rtlCol="0" anchor="t">
             <a:spAutoFit/>
           </a:bodyPr>
           <a:lstStyle/>
           <a:p>
-            <a:pPr algn="l" marL="0" indent="0" lvl="0">
+            <a:pPr marL="0" lvl="0" indent="0" algn="l">
               <a:lnSpc>
                 <a:spcPts val="1500"/>
               </a:lnSpc>
@@ -6942,7 +6909,7 @@
             </a:r>
           </a:p>
           <a:p>
-            <a:pPr algn="l" marL="0" indent="0" lvl="0">
+            <a:pPr marL="0" lvl="0" indent="0" algn="l">
               <a:lnSpc>
                 <a:spcPts val="1500"/>
               </a:lnSpc>
@@ -6964,12 +6931,12 @@
       </p:sp>
       <p:sp>
         <p:nvSpPr>
-          <p:cNvPr name="TextBox 11" id="11"/>
-          <p:cNvSpPr txBox="true"/>
+          <p:cNvPr id="11" name="TextBox 11"/>
+          <p:cNvSpPr txBox="1"/>
           <p:nvPr/>
         </p:nvSpPr>
         <p:spPr>
-          <a:xfrm rot="0">
+          <a:xfrm>
             <a:off x="1028700" y="3516907"/>
             <a:ext cx="7804538" cy="1560746"/>
           </a:xfrm>
@@ -6978,18 +6945,18 @@
           </a:prstGeom>
         </p:spPr>
         <p:txBody>
-          <a:bodyPr anchor="t" rtlCol="false" tIns="0" lIns="0" bIns="0" rIns="0">
+          <a:bodyPr lIns="0" tIns="0" rIns="0" bIns="0" rtlCol="0" anchor="t">
             <a:spAutoFit/>
           </a:bodyPr>
           <a:lstStyle/>
           <a:p>
-            <a:pPr algn="l" marL="0" indent="0" lvl="0">
+            <a:pPr marL="0" lvl="0" indent="0" algn="l">
               <a:lnSpc>
                 <a:spcPts val="12141"/>
               </a:lnSpc>
             </a:pPr>
             <a:r>
-              <a:rPr lang="en-US" b="true" sz="10558">
+              <a:rPr lang="en-US" sz="10558" b="1">
                 <a:solidFill>
                   <a:srgbClr val="000000"/>
                 </a:solidFill>
@@ -7005,12 +6972,12 @@
       </p:sp>
       <p:sp>
         <p:nvSpPr>
-          <p:cNvPr name="TextBox 12" id="12"/>
-          <p:cNvSpPr txBox="true"/>
+          <p:cNvPr id="12" name="TextBox 12"/>
+          <p:cNvSpPr txBox="1"/>
           <p:nvPr/>
         </p:nvSpPr>
         <p:spPr>
-          <a:xfrm rot="0">
+          <a:xfrm>
             <a:off x="1028700" y="7128071"/>
             <a:ext cx="2230214" cy="193548"/>
           </a:xfrm>
@@ -7019,12 +6986,12 @@
           </a:prstGeom>
         </p:spPr>
         <p:txBody>
-          <a:bodyPr anchor="t" rtlCol="false" tIns="0" lIns="0" bIns="0" rIns="0">
+          <a:bodyPr lIns="0" tIns="0" rIns="0" bIns="0" rtlCol="0" anchor="t">
             <a:spAutoFit/>
           </a:bodyPr>
           <a:lstStyle/>
           <a:p>
-            <a:pPr algn="l" marL="0" indent="0" lvl="0">
+            <a:pPr marL="0" lvl="0" indent="0" algn="l">
               <a:lnSpc>
                 <a:spcPts val="1716"/>
               </a:lnSpc>
@@ -7046,12 +7013,12 @@
       </p:sp>
       <p:sp>
         <p:nvSpPr>
-          <p:cNvPr name="TextBox 13" id="13"/>
-          <p:cNvSpPr txBox="true"/>
+          <p:cNvPr id="13" name="TextBox 13"/>
+          <p:cNvSpPr txBox="1"/>
           <p:nvPr/>
         </p:nvSpPr>
         <p:spPr>
-          <a:xfrm rot="0">
+          <a:xfrm>
             <a:off x="4264978" y="7128071"/>
             <a:ext cx="3577563" cy="193548"/>
           </a:xfrm>
@@ -7060,12 +7027,12 @@
           </a:prstGeom>
         </p:spPr>
         <p:txBody>
-          <a:bodyPr anchor="t" rtlCol="false" tIns="0" lIns="0" bIns="0" rIns="0">
+          <a:bodyPr lIns="0" tIns="0" rIns="0" bIns="0" rtlCol="0" anchor="t">
             <a:spAutoFit/>
           </a:bodyPr>
           <a:lstStyle/>
           <a:p>
-            <a:pPr algn="l" marL="0" indent="0" lvl="0">
+            <a:pPr marL="0" lvl="0" indent="0" algn="l">
               <a:lnSpc>
                 <a:spcPts val="1716"/>
               </a:lnSpc>
